--- a/MSRX2025_SeaSurfaceRadarSimulation/Reunions/Avancement 07_11_2025.pptx
+++ b/MSRX2025_SeaSurfaceRadarSimulation/Reunions/Avancement 07_11_2025.pptx
@@ -5,7 +5,7 @@
     <p:sldMasterId id="2147483680" r:id="rId1"/>
   </p:sldMasterIdLst>
   <p:notesMasterIdLst>
-    <p:notesMasterId r:id="rId12"/>
+    <p:notesMasterId r:id="rId13"/>
   </p:notesMasterIdLst>
   <p:sldIdLst>
     <p:sldId id="256" r:id="rId2"/>
@@ -14,38 +14,46 @@
     <p:sldId id="266" r:id="rId5"/>
     <p:sldId id="270" r:id="rId6"/>
     <p:sldId id="267" r:id="rId7"/>
-    <p:sldId id="271" r:id="rId8"/>
-    <p:sldId id="272" r:id="rId9"/>
-    <p:sldId id="269" r:id="rId10"/>
-    <p:sldId id="265" r:id="rId11"/>
+    <p:sldId id="273" r:id="rId8"/>
+    <p:sldId id="271" r:id="rId9"/>
+    <p:sldId id="272" r:id="rId10"/>
+    <p:sldId id="269" r:id="rId11"/>
+    <p:sldId id="265" r:id="rId12"/>
   </p:sldIdLst>
   <p:sldSz cx="9144000" cy="5143500" type="screen16x9"/>
   <p:notesSz cx="6858000" cy="9144000"/>
   <p:embeddedFontLst>
     <p:embeddedFont>
-      <p:font typeface="Aharoni" panose="02010803020104030203" pitchFamily="2" charset="-79"/>
-      <p:bold r:id="rId13"/>
+      <p:font typeface="Aharoni" panose="020B0604020202020204" charset="-79"/>
+      <p:bold r:id="rId14"/>
     </p:embeddedFont>
     <p:embeddedFont>
-      <p:font typeface="Montserrat" panose="00000500000000000000" pitchFamily="2" charset="0"/>
-      <p:regular r:id="rId14"/>
-      <p:bold r:id="rId15"/>
-      <p:italic r:id="rId16"/>
-      <p:boldItalic r:id="rId17"/>
+      <p:font typeface="Montserrat Light" panose="020B0604020202020204" charset="0"/>
+      <p:regular r:id="rId15"/>
+      <p:bold r:id="rId16"/>
+      <p:italic r:id="rId17"/>
+      <p:boldItalic r:id="rId18"/>
     </p:embeddedFont>
     <p:embeddedFont>
-      <p:font typeface="Montserrat Light" panose="00000400000000000000" pitchFamily="2" charset="0"/>
-      <p:regular r:id="rId18"/>
-      <p:bold r:id="rId19"/>
-      <p:italic r:id="rId20"/>
-      <p:boldItalic r:id="rId21"/>
+      <p:font typeface="Montserrat SemiBold" panose="020B0604020202020204" charset="0"/>
+      <p:regular r:id="rId19"/>
+      <p:bold r:id="rId20"/>
+      <p:italic r:id="rId21"/>
+      <p:boldItalic r:id="rId22"/>
     </p:embeddedFont>
     <p:embeddedFont>
-      <p:font typeface="Montserrat SemiBold" panose="00000700000000000000" pitchFamily="2" charset="0"/>
-      <p:regular r:id="rId22"/>
-      <p:bold r:id="rId23"/>
-      <p:italic r:id="rId24"/>
-      <p:boldItalic r:id="rId25"/>
+      <p:font typeface="Calibri" panose="020F0502020204030204" pitchFamily="34" charset="0"/>
+      <p:regular r:id="rId23"/>
+      <p:bold r:id="rId24"/>
+      <p:italic r:id="rId25"/>
+      <p:boldItalic r:id="rId26"/>
+    </p:embeddedFont>
+    <p:embeddedFont>
+      <p:font typeface="Montserrat" panose="020B0604020202020204" charset="0"/>
+      <p:regular r:id="rId27"/>
+      <p:bold r:id="rId28"/>
+      <p:italic r:id="rId29"/>
+      <p:boldItalic r:id="rId30"/>
     </p:embeddedFont>
   </p:embeddedFontLst>
   <p:defaultTextStyle>
@@ -520,6 +528,11 @@
         </p:txBody>
       </p:sp>
     </p:spTree>
+    <p:extLst>
+      <p:ext uri="{BB962C8B-B14F-4D97-AF65-F5344CB8AC3E}">
+        <p14:creationId xmlns:p14="http://schemas.microsoft.com/office/powerpoint/2010/main" val="3468561956"/>
+      </p:ext>
+    </p:extLst>
   </p:cSld>
   <p:clrMap bg1="lt1" tx1="dk1" bg2="dk2" tx2="lt2" accent1="accent1" accent2="accent2" accent3="accent3" accent4="accent4" accent5="accent5" accent6="accent6" hlink="hlink" folHlink="folHlink"/>
   <p:notesStyle>
@@ -858,6 +871,11 @@
         </p:txBody>
       </p:sp>
     </p:spTree>
+    <p:extLst>
+      <p:ext uri="{BB962C8B-B14F-4D97-AF65-F5344CB8AC3E}">
+        <p14:creationId xmlns:p14="http://schemas.microsoft.com/office/powerpoint/2010/main" val="3749533226"/>
+      </p:ext>
+    </p:extLst>
   </p:cSld>
   <p:clrMapOvr>
     <a:masterClrMapping/>
@@ -969,6 +987,11 @@
         </p:txBody>
       </p:sp>
     </p:spTree>
+    <p:extLst>
+      <p:ext uri="{BB962C8B-B14F-4D97-AF65-F5344CB8AC3E}">
+        <p14:creationId xmlns:p14="http://schemas.microsoft.com/office/powerpoint/2010/main" val="3020852438"/>
+      </p:ext>
+    </p:extLst>
   </p:cSld>
   <p:clrMapOvr>
     <a:masterClrMapping/>
@@ -1080,6 +1103,11 @@
         </p:txBody>
       </p:sp>
     </p:spTree>
+    <p:extLst>
+      <p:ext uri="{BB962C8B-B14F-4D97-AF65-F5344CB8AC3E}">
+        <p14:creationId xmlns:p14="http://schemas.microsoft.com/office/powerpoint/2010/main" val="1226652860"/>
+      </p:ext>
+    </p:extLst>
   </p:cSld>
   <p:clrMapOvr>
     <a:masterClrMapping/>
@@ -1095,7 +1123,7 @@
         <p:cNvPr id="1" name="Shape 267">
           <a:extLst>
             <a:ext uri="{FF2B5EF4-FFF2-40B4-BE49-F238E27FC236}">
-              <a16:creationId xmlns:a16="http://schemas.microsoft.com/office/drawing/2014/main" id="{159AD074-6A31-88F2-C13A-D826EA290778}"/>
+              <a16:creationId xmlns:a16="http://schemas.microsoft.com/office/drawing/2014/main" xmlns="" id="{159AD074-6A31-88F2-C13A-D826EA290778}"/>
             </a:ext>
           </a:extLst>
         </p:cNvPr>
@@ -1115,7 +1143,7 @@
           <p:cNvPr id="268" name="Google Shape;268;g2468f01b72f_0_219:notes">
             <a:extLst>
               <a:ext uri="{FF2B5EF4-FFF2-40B4-BE49-F238E27FC236}">
-                <a16:creationId xmlns:a16="http://schemas.microsoft.com/office/drawing/2014/main" id="{7FEE9361-9624-EB89-3868-9C0DB4A9D0D0}"/>
+                <a16:creationId xmlns:a16="http://schemas.microsoft.com/office/drawing/2014/main" xmlns="" id="{7FEE9361-9624-EB89-3868-9C0DB4A9D0D0}"/>
               </a:ext>
             </a:extLst>
           </p:cNvPr>
@@ -1169,7 +1197,7 @@
           <p:cNvPr id="269" name="Google Shape;269;g2468f01b72f_0_219:notes">
             <a:extLst>
               <a:ext uri="{FF2B5EF4-FFF2-40B4-BE49-F238E27FC236}">
-                <a16:creationId xmlns:a16="http://schemas.microsoft.com/office/drawing/2014/main" id="{0B55DB47-90E8-5906-7EFE-C7BA2F2C332B}"/>
+                <a16:creationId xmlns:a16="http://schemas.microsoft.com/office/drawing/2014/main" xmlns="" id="{0B55DB47-90E8-5906-7EFE-C7BA2F2C332B}"/>
               </a:ext>
             </a:extLst>
           </p:cNvPr>
@@ -1226,10 +1254,10 @@
   <p:cSld>
     <p:spTree>
       <p:nvGrpSpPr>
-        <p:cNvPr id="1" name="Shape 223">
+        <p:cNvPr id="1" name="Shape 267">
           <a:extLst>
             <a:ext uri="{FF2B5EF4-FFF2-40B4-BE49-F238E27FC236}">
-              <a16:creationId xmlns:a16="http://schemas.microsoft.com/office/drawing/2014/main" id="{20D9C6CE-69F2-2EE5-0FE7-9353C6000201}"/>
+              <a16:creationId xmlns:a16="http://schemas.microsoft.com/office/drawing/2014/main" xmlns="" id="{159AD074-6A31-88F2-C13A-D826EA290778}"/>
             </a:ext>
           </a:extLst>
         </p:cNvPr>
@@ -1246,10 +1274,10 @@
       </p:grpSpPr>
       <p:sp>
         <p:nvSpPr>
-          <p:cNvPr id="224" name="Google Shape;224;g255edab1364_0_1:notes">
+          <p:cNvPr id="268" name="Google Shape;268;g2468f01b72f_0_219:notes">
             <a:extLst>
               <a:ext uri="{FF2B5EF4-FFF2-40B4-BE49-F238E27FC236}">
-                <a16:creationId xmlns:a16="http://schemas.microsoft.com/office/drawing/2014/main" id="{0E3616D1-D9D1-4B2B-8EE9-FDEFEC80C7AB}"/>
+                <a16:creationId xmlns:a16="http://schemas.microsoft.com/office/drawing/2014/main" xmlns="" id="{7FEE9361-9624-EB89-3868-9C0DB4A9D0D0}"/>
               </a:ext>
             </a:extLst>
           </p:cNvPr>
@@ -1300,10 +1328,10 @@
       </p:sp>
       <p:sp>
         <p:nvSpPr>
-          <p:cNvPr id="225" name="Google Shape;225;g255edab1364_0_1:notes">
+          <p:cNvPr id="269" name="Google Shape;269;g2468f01b72f_0_219:notes">
             <a:extLst>
               <a:ext uri="{FF2B5EF4-FFF2-40B4-BE49-F238E27FC236}">
-                <a16:creationId xmlns:a16="http://schemas.microsoft.com/office/drawing/2014/main" id="{931E241B-8487-6142-35FD-0BE93438AC74}"/>
+                <a16:creationId xmlns:a16="http://schemas.microsoft.com/office/drawing/2014/main" xmlns="" id="{0B55DB47-90E8-5906-7EFE-C7BA2F2C332B}"/>
               </a:ext>
             </a:extLst>
           </p:cNvPr>
@@ -1345,7 +1373,7 @@
     </p:spTree>
     <p:extLst>
       <p:ext uri="{BB962C8B-B14F-4D97-AF65-F5344CB8AC3E}">
-        <p14:creationId xmlns:p14="http://schemas.microsoft.com/office/powerpoint/2010/main" val="2855759751"/>
+        <p14:creationId xmlns:p14="http://schemas.microsoft.com/office/powerpoint/2010/main" val="3411336789"/>
       </p:ext>
     </p:extLst>
   </p:cSld>
@@ -1360,7 +1388,13 @@
   <p:cSld>
     <p:spTree>
       <p:nvGrpSpPr>
-        <p:cNvPr id="1" name="Shape 293"/>
+        <p:cNvPr id="1" name="Shape 223">
+          <a:extLst>
+            <a:ext uri="{FF2B5EF4-FFF2-40B4-BE49-F238E27FC236}">
+              <a16:creationId xmlns:a16="http://schemas.microsoft.com/office/drawing/2014/main" xmlns="" id="{20D9C6CE-69F2-2EE5-0FE7-9353C6000201}"/>
+            </a:ext>
+          </a:extLst>
+        </p:cNvPr>
         <p:cNvGrpSpPr/>
         <p:nvPr/>
       </p:nvGrpSpPr>
@@ -1374,49 +1408,13 @@
       </p:grpSpPr>
       <p:sp>
         <p:nvSpPr>
-          <p:cNvPr id="294" name="Google Shape;294;g28480a69043_0_13:notes"/>
-          <p:cNvSpPr txBox="1">
-            <a:spLocks noGrp="1"/>
-          </p:cNvSpPr>
-          <p:nvPr>
-            <p:ph type="body" idx="1"/>
-          </p:nvPr>
-        </p:nvSpPr>
-        <p:spPr>
-          <a:xfrm>
-            <a:off x="685800" y="4343400"/>
-            <a:ext cx="5486400" cy="4114800"/>
-          </a:xfrm>
-          <a:prstGeom prst="rect">
-            <a:avLst/>
-          </a:prstGeom>
-          <a:noFill/>
-          <a:ln>
-            <a:noFill/>
-          </a:ln>
-        </p:spPr>
-        <p:txBody>
-          <a:bodyPr spcFirstLastPara="1" wrap="square" lIns="91425" tIns="91425" rIns="91425" bIns="91425" anchor="ctr" anchorCtr="0">
-            <a:noAutofit/>
-          </a:bodyPr>
-          <a:lstStyle/>
-          <a:p>
-            <a:pPr marL="0" lvl="0" indent="0" algn="l" rtl="0">
-              <a:spcBef>
-                <a:spcPts val="0"/>
-              </a:spcBef>
-              <a:spcAft>
-                <a:spcPts val="0"/>
-              </a:spcAft>
-              <a:buNone/>
-            </a:pPr>
-            <a:endParaRPr/>
-          </a:p>
-        </p:txBody>
-      </p:sp>
-      <p:sp>
-        <p:nvSpPr>
-          <p:cNvPr id="295" name="Google Shape;295;g28480a69043_0_13:notes"/>
+          <p:cNvPr id="224" name="Google Shape;224;g255edab1364_0_1:notes">
+            <a:extLst>
+              <a:ext uri="{FF2B5EF4-FFF2-40B4-BE49-F238E27FC236}">
+                <a16:creationId xmlns:a16="http://schemas.microsoft.com/office/drawing/2014/main" xmlns="" id="{0E3616D1-D9D1-4B2B-8EE9-FDEFEC80C7AB}"/>
+              </a:ext>
+            </a:extLst>
+          </p:cNvPr>
           <p:cNvSpPr>
             <a:spLocks noGrp="1" noRot="1" noChangeAspect="1"/>
           </p:cNvSpPr>
@@ -1462,7 +1460,176 @@
           </a:p>
         </p:txBody>
       </p:sp>
+      <p:sp>
+        <p:nvSpPr>
+          <p:cNvPr id="225" name="Google Shape;225;g255edab1364_0_1:notes">
+            <a:extLst>
+              <a:ext uri="{FF2B5EF4-FFF2-40B4-BE49-F238E27FC236}">
+                <a16:creationId xmlns:a16="http://schemas.microsoft.com/office/drawing/2014/main" xmlns="" id="{931E241B-8487-6142-35FD-0BE93438AC74}"/>
+              </a:ext>
+            </a:extLst>
+          </p:cNvPr>
+          <p:cNvSpPr txBox="1">
+            <a:spLocks noGrp="1"/>
+          </p:cNvSpPr>
+          <p:nvPr>
+            <p:ph type="body" idx="1"/>
+          </p:nvPr>
+        </p:nvSpPr>
+        <p:spPr>
+          <a:xfrm>
+            <a:off x="685800" y="4343400"/>
+            <a:ext cx="5486400" cy="4114800"/>
+          </a:xfrm>
+          <a:prstGeom prst="rect">
+            <a:avLst/>
+          </a:prstGeom>
+        </p:spPr>
+        <p:txBody>
+          <a:bodyPr spcFirstLastPara="1" wrap="square" lIns="91425" tIns="91425" rIns="91425" bIns="91425" anchor="t" anchorCtr="0">
+            <a:noAutofit/>
+          </a:bodyPr>
+          <a:lstStyle/>
+          <a:p>
+            <a:pPr marL="0" lvl="0" indent="0" algn="l" rtl="0">
+              <a:spcBef>
+                <a:spcPts val="0"/>
+              </a:spcBef>
+              <a:spcAft>
+                <a:spcPts val="0"/>
+              </a:spcAft>
+              <a:buNone/>
+            </a:pPr>
+            <a:endParaRPr/>
+          </a:p>
+        </p:txBody>
+      </p:sp>
     </p:spTree>
+    <p:extLst>
+      <p:ext uri="{BB962C8B-B14F-4D97-AF65-F5344CB8AC3E}">
+        <p14:creationId xmlns:p14="http://schemas.microsoft.com/office/powerpoint/2010/main" val="2855759751"/>
+      </p:ext>
+    </p:extLst>
+  </p:cSld>
+  <p:clrMapOvr>
+    <a:masterClrMapping/>
+  </p:clrMapOvr>
+</p:notes>
+</file>
+
+<file path=ppt/notesSlides/notesSlide7.xml><?xml version="1.0" encoding="utf-8"?>
+<p:notes xmlns:a="http://schemas.openxmlformats.org/drawingml/2006/main" xmlns:r="http://schemas.openxmlformats.org/officeDocument/2006/relationships" xmlns:p="http://schemas.openxmlformats.org/presentationml/2006/main" showMasterSp="0" showMasterPhAnim="0">
+  <p:cSld>
+    <p:spTree>
+      <p:nvGrpSpPr>
+        <p:cNvPr id="1" name="Shape 293"/>
+        <p:cNvGrpSpPr/>
+        <p:nvPr/>
+      </p:nvGrpSpPr>
+      <p:grpSpPr>
+        <a:xfrm>
+          <a:off x="0" y="0"/>
+          <a:ext cx="0" cy="0"/>
+          <a:chOff x="0" y="0"/>
+          <a:chExt cx="0" cy="0"/>
+        </a:xfrm>
+      </p:grpSpPr>
+      <p:sp>
+        <p:nvSpPr>
+          <p:cNvPr id="294" name="Google Shape;294;g28480a69043_0_13:notes"/>
+          <p:cNvSpPr txBox="1">
+            <a:spLocks noGrp="1"/>
+          </p:cNvSpPr>
+          <p:nvPr>
+            <p:ph type="body" idx="1"/>
+          </p:nvPr>
+        </p:nvSpPr>
+        <p:spPr>
+          <a:xfrm>
+            <a:off x="685800" y="4343400"/>
+            <a:ext cx="5486400" cy="4114800"/>
+          </a:xfrm>
+          <a:prstGeom prst="rect">
+            <a:avLst/>
+          </a:prstGeom>
+          <a:noFill/>
+          <a:ln>
+            <a:noFill/>
+          </a:ln>
+        </p:spPr>
+        <p:txBody>
+          <a:bodyPr spcFirstLastPara="1" wrap="square" lIns="91425" tIns="91425" rIns="91425" bIns="91425" anchor="ctr" anchorCtr="0">
+            <a:noAutofit/>
+          </a:bodyPr>
+          <a:lstStyle/>
+          <a:p>
+            <a:pPr marL="0" lvl="0" indent="0" algn="l" rtl="0">
+              <a:spcBef>
+                <a:spcPts val="0"/>
+              </a:spcBef>
+              <a:spcAft>
+                <a:spcPts val="0"/>
+              </a:spcAft>
+              <a:buNone/>
+            </a:pPr>
+            <a:endParaRPr/>
+          </a:p>
+        </p:txBody>
+      </p:sp>
+      <p:sp>
+        <p:nvSpPr>
+          <p:cNvPr id="295" name="Google Shape;295;g28480a69043_0_13:notes"/>
+          <p:cNvSpPr>
+            <a:spLocks noGrp="1" noRot="1" noChangeAspect="1"/>
+          </p:cNvSpPr>
+          <p:nvPr>
+            <p:ph type="sldImg" idx="2"/>
+          </p:nvPr>
+        </p:nvSpPr>
+        <p:spPr>
+          <a:xfrm>
+            <a:off x="381000" y="685800"/>
+            <a:ext cx="6096000" cy="3429000"/>
+          </a:xfrm>
+          <a:custGeom>
+            <a:avLst/>
+            <a:gdLst/>
+            <a:ahLst/>
+            <a:cxnLst/>
+            <a:rect l="l" t="t" r="r" b="b"/>
+            <a:pathLst>
+              <a:path w="120000" h="120000" extrusionOk="0">
+                <a:moveTo>
+                  <a:pt x="0" y="0"/>
+                </a:moveTo>
+                <a:lnTo>
+                  <a:pt x="120000" y="0"/>
+                </a:lnTo>
+                <a:lnTo>
+                  <a:pt x="120000" y="120000"/>
+                </a:lnTo>
+                <a:lnTo>
+                  <a:pt x="0" y="120000"/>
+                </a:lnTo>
+                <a:close/>
+              </a:path>
+            </a:pathLst>
+          </a:custGeom>
+        </p:spPr>
+        <p:txBody>
+          <a:bodyPr/>
+          <a:lstStyle/>
+          <a:p>
+            <a:endParaRPr lang="fr-CM"/>
+          </a:p>
+        </p:txBody>
+      </p:sp>
+    </p:spTree>
+    <p:extLst>
+      <p:ext uri="{BB962C8B-B14F-4D97-AF65-F5344CB8AC3E}">
+        <p14:creationId xmlns:p14="http://schemas.microsoft.com/office/powerpoint/2010/main" val="595545991"/>
+      </p:ext>
+    </p:extLst>
   </p:cSld>
   <p:clrMapOvr>
     <a:masterClrMapping/>
@@ -7562,10 +7729,10 @@
                 <a:cs typeface="Montserrat"/>
                 <a:sym typeface="Montserrat"/>
               </a:rPr>
-              <a:t>Présentation </a:t>
+              <a:t>Présentation d’avancement </a:t>
             </a:r>
             <a:r>
-              <a:rPr lang="fr" sz="3800">
+              <a:rPr lang="fr" sz="3800" dirty="0" smtClean="0">
                 <a:solidFill>
                   <a:srgbClr val="F39200"/>
                 </a:solidFill>
@@ -7577,7 +7744,22 @@
                 <a:cs typeface="Montserrat"/>
                 <a:sym typeface="Montserrat"/>
               </a:rPr>
-              <a:t>d’avancement 07/11/2025</a:t>
+              <a:t>12</a:t>
+            </a:r>
+            <a:r>
+              <a:rPr lang="fr" sz="3800" dirty="0" smtClean="0">
+                <a:solidFill>
+                  <a:srgbClr val="F39200"/>
+                </a:solidFill>
+                <a:highlight>
+                  <a:srgbClr val="FFFFFF"/>
+                </a:highlight>
+                <a:latin typeface="Montserrat"/>
+                <a:ea typeface="Montserrat"/>
+                <a:cs typeface="Montserrat"/>
+                <a:sym typeface="Montserrat"/>
+              </a:rPr>
+              <a:t>/03/2026</a:t>
             </a:r>
             <a:endParaRPr sz="3800" b="1" dirty="0">
               <a:solidFill>
@@ -7629,7 +7811,7 @@
               <a:buNone/>
             </a:pPr>
             <a:r>
-              <a:rPr lang="fr" sz="1500" dirty="0">
+              <a:rPr lang="fr" sz="1500" dirty="0" smtClean="0">
                 <a:solidFill>
                   <a:srgbClr val="646363"/>
                 </a:solidFill>
@@ -7638,7 +7820,7 @@
                 <a:cs typeface="Montserrat"/>
                 <a:sym typeface="Montserrat"/>
               </a:rPr>
-              <a:t>Rosilia MODJO</a:t>
+              <a:t>YOUSSAOU ISMAILA BOBOY</a:t>
             </a:r>
             <a:endParaRPr sz="1500" dirty="0">
               <a:solidFill>
@@ -7661,6 +7843,435 @@
 </file>
 
 <file path=ppt/slides/slide10.xml><?xml version="1.0" encoding="utf-8"?>
+<p:sld xmlns:a="http://schemas.openxmlformats.org/drawingml/2006/main" xmlns:r="http://schemas.openxmlformats.org/officeDocument/2006/relationships" xmlns:p="http://schemas.openxmlformats.org/presentationml/2006/main">
+  <p:cSld>
+    <p:spTree>
+      <p:nvGrpSpPr>
+        <p:cNvPr id="1" name="Shape 226">
+          <a:extLst>
+            <a:ext uri="{FF2B5EF4-FFF2-40B4-BE49-F238E27FC236}">
+              <a16:creationId xmlns:a16="http://schemas.microsoft.com/office/drawing/2014/main" xmlns="" id="{7386E986-1ADE-CB08-82E5-9334B2A9E103}"/>
+            </a:ext>
+          </a:extLst>
+        </p:cNvPr>
+        <p:cNvGrpSpPr/>
+        <p:nvPr/>
+      </p:nvGrpSpPr>
+      <p:grpSpPr>
+        <a:xfrm>
+          <a:off x="0" y="0"/>
+          <a:ext cx="0" cy="0"/>
+          <a:chOff x="0" y="0"/>
+          <a:chExt cx="0" cy="0"/>
+        </a:xfrm>
+      </p:grpSpPr>
+      <p:sp>
+        <p:nvSpPr>
+          <p:cNvPr id="227" name="Google Shape;227;p38">
+            <a:extLst>
+              <a:ext uri="{FF2B5EF4-FFF2-40B4-BE49-F238E27FC236}">
+                <a16:creationId xmlns:a16="http://schemas.microsoft.com/office/drawing/2014/main" xmlns="" id="{29385FAF-BA05-27AC-1E08-0CB2247C2B6B}"/>
+              </a:ext>
+            </a:extLst>
+          </p:cNvPr>
+          <p:cNvSpPr/>
+          <p:nvPr/>
+        </p:nvSpPr>
+        <p:spPr>
+          <a:xfrm>
+            <a:off x="1350" y="2145300"/>
+            <a:ext cx="9141300" cy="2466900"/>
+          </a:xfrm>
+          <a:prstGeom prst="rect">
+            <a:avLst/>
+          </a:prstGeom>
+          <a:solidFill>
+            <a:schemeClr val="lt2"/>
+          </a:solidFill>
+          <a:ln>
+            <a:noFill/>
+          </a:ln>
+        </p:spPr>
+        <p:txBody>
+          <a:bodyPr spcFirstLastPara="1" wrap="square" lIns="91425" tIns="91425" rIns="91425" bIns="91425" anchor="ctr" anchorCtr="0">
+            <a:noAutofit/>
+          </a:bodyPr>
+          <a:lstStyle/>
+          <a:p>
+            <a:pPr marL="0" lvl="0" indent="0" algn="l" rtl="0">
+              <a:spcBef>
+                <a:spcPts val="0"/>
+              </a:spcBef>
+              <a:spcAft>
+                <a:spcPts val="0"/>
+              </a:spcAft>
+              <a:buNone/>
+            </a:pPr>
+            <a:endParaRPr/>
+          </a:p>
+        </p:txBody>
+      </p:sp>
+      <p:pic>
+        <p:nvPicPr>
+          <p:cNvPr id="228" name="Google Shape;228;p38">
+            <a:extLst>
+              <a:ext uri="{FF2B5EF4-FFF2-40B4-BE49-F238E27FC236}">
+                <a16:creationId xmlns:a16="http://schemas.microsoft.com/office/drawing/2014/main" xmlns="" id="{F0F2850D-416C-9038-8B91-3BD6239A6DDD}"/>
+              </a:ext>
+            </a:extLst>
+          </p:cNvPr>
+          <p:cNvPicPr preferRelativeResize="0"/>
+          <p:nvPr/>
+        </p:nvPicPr>
+        <p:blipFill>
+          <a:blip r:embed="rId3">
+            <a:alphaModFix/>
+          </a:blip>
+          <a:stretch>
+            <a:fillRect/>
+          </a:stretch>
+        </p:blipFill>
+        <p:spPr>
+          <a:xfrm>
+            <a:off x="3484075" y="2150"/>
+            <a:ext cx="5659925" cy="2114550"/>
+          </a:xfrm>
+          <a:prstGeom prst="rect">
+            <a:avLst/>
+          </a:prstGeom>
+          <a:noFill/>
+          <a:ln>
+            <a:noFill/>
+          </a:ln>
+        </p:spPr>
+      </p:pic>
+      <p:sp>
+        <p:nvSpPr>
+          <p:cNvPr id="229" name="Google Shape;229;p38">
+            <a:extLst>
+              <a:ext uri="{FF2B5EF4-FFF2-40B4-BE49-F238E27FC236}">
+                <a16:creationId xmlns:a16="http://schemas.microsoft.com/office/drawing/2014/main" xmlns="" id="{32925A70-4A56-9FC5-7F84-BD587D9FF427}"/>
+              </a:ext>
+            </a:extLst>
+          </p:cNvPr>
+          <p:cNvSpPr/>
+          <p:nvPr/>
+        </p:nvSpPr>
+        <p:spPr>
+          <a:xfrm>
+            <a:off x="1350" y="0"/>
+            <a:ext cx="3482700" cy="2114400"/>
+          </a:xfrm>
+          <a:prstGeom prst="rect">
+            <a:avLst/>
+          </a:prstGeom>
+          <a:solidFill>
+            <a:srgbClr val="09B0B3"/>
+          </a:solidFill>
+          <a:ln>
+            <a:noFill/>
+          </a:ln>
+        </p:spPr>
+        <p:txBody>
+          <a:bodyPr spcFirstLastPara="1" wrap="square" lIns="91425" tIns="91425" rIns="91425" bIns="91425" anchor="ctr" anchorCtr="0">
+            <a:noAutofit/>
+          </a:bodyPr>
+          <a:lstStyle/>
+          <a:p>
+            <a:pPr marL="0" lvl="0" indent="0" algn="l" rtl="0">
+              <a:spcBef>
+                <a:spcPts val="0"/>
+              </a:spcBef>
+              <a:spcAft>
+                <a:spcPts val="0"/>
+              </a:spcAft>
+              <a:buNone/>
+            </a:pPr>
+            <a:endParaRPr/>
+          </a:p>
+        </p:txBody>
+      </p:sp>
+      <p:sp>
+        <p:nvSpPr>
+          <p:cNvPr id="230" name="Google Shape;230;p38">
+            <a:extLst>
+              <a:ext uri="{FF2B5EF4-FFF2-40B4-BE49-F238E27FC236}">
+                <a16:creationId xmlns:a16="http://schemas.microsoft.com/office/drawing/2014/main" xmlns="" id="{3D9D39D2-FF67-7009-03A2-B675022B58A2}"/>
+              </a:ext>
+            </a:extLst>
+          </p:cNvPr>
+          <p:cNvSpPr txBox="1"/>
+          <p:nvPr/>
+        </p:nvSpPr>
+        <p:spPr>
+          <a:xfrm>
+            <a:off x="1040500" y="4715250"/>
+            <a:ext cx="4886100" cy="323100"/>
+          </a:xfrm>
+          <a:prstGeom prst="rect">
+            <a:avLst/>
+          </a:prstGeom>
+          <a:noFill/>
+          <a:ln>
+            <a:noFill/>
+          </a:ln>
+        </p:spPr>
+        <p:txBody>
+          <a:bodyPr spcFirstLastPara="1" wrap="square" lIns="91425" tIns="91425" rIns="91425" bIns="91425" anchor="t" anchorCtr="0">
+            <a:spAutoFit/>
+          </a:bodyPr>
+          <a:lstStyle/>
+          <a:p>
+            <a:pPr marL="0" lvl="0" indent="0" algn="l" rtl="0">
+              <a:lnSpc>
+                <a:spcPct val="115000"/>
+              </a:lnSpc>
+              <a:spcBef>
+                <a:spcPts val="0"/>
+              </a:spcBef>
+              <a:spcAft>
+                <a:spcPts val="0"/>
+              </a:spcAft>
+              <a:buNone/>
+            </a:pPr>
+            <a:endParaRPr sz="900">
+              <a:solidFill>
+                <a:srgbClr val="646363"/>
+              </a:solidFill>
+              <a:latin typeface="Montserrat"/>
+              <a:ea typeface="Montserrat"/>
+              <a:cs typeface="Montserrat"/>
+              <a:sym typeface="Montserrat"/>
+            </a:endParaRPr>
+          </a:p>
+        </p:txBody>
+      </p:sp>
+      <p:pic>
+        <p:nvPicPr>
+          <p:cNvPr id="232" name="Google Shape;232;p38">
+            <a:extLst>
+              <a:ext uri="{FF2B5EF4-FFF2-40B4-BE49-F238E27FC236}">
+                <a16:creationId xmlns:a16="http://schemas.microsoft.com/office/drawing/2014/main" xmlns="" id="{6835C172-CF37-24B8-9C3B-314FE892F071}"/>
+              </a:ext>
+            </a:extLst>
+          </p:cNvPr>
+          <p:cNvPicPr preferRelativeResize="0"/>
+          <p:nvPr/>
+        </p:nvPicPr>
+        <p:blipFill>
+          <a:blip r:embed="rId4">
+            <a:alphaModFix/>
+          </a:blip>
+          <a:stretch>
+            <a:fillRect/>
+          </a:stretch>
+        </p:blipFill>
+        <p:spPr>
+          <a:xfrm>
+            <a:off x="8035050" y="4614500"/>
+            <a:ext cx="696375" cy="447700"/>
+          </a:xfrm>
+          <a:prstGeom prst="rect">
+            <a:avLst/>
+          </a:prstGeom>
+          <a:noFill/>
+          <a:ln>
+            <a:noFill/>
+          </a:ln>
+        </p:spPr>
+      </p:pic>
+      <p:sp>
+        <p:nvSpPr>
+          <p:cNvPr id="234" name="Google Shape;234;p38">
+            <a:extLst>
+              <a:ext uri="{FF2B5EF4-FFF2-40B4-BE49-F238E27FC236}">
+                <a16:creationId xmlns:a16="http://schemas.microsoft.com/office/drawing/2014/main" xmlns="" id="{F16F5A86-D019-C53A-FC37-3A7EA3BC0521}"/>
+              </a:ext>
+            </a:extLst>
+          </p:cNvPr>
+          <p:cNvSpPr txBox="1"/>
+          <p:nvPr/>
+        </p:nvSpPr>
+        <p:spPr>
+          <a:xfrm>
+            <a:off x="824528" y="858560"/>
+            <a:ext cx="3119007" cy="666819"/>
+          </a:xfrm>
+          <a:prstGeom prst="rect">
+            <a:avLst/>
+          </a:prstGeom>
+          <a:noFill/>
+          <a:ln>
+            <a:noFill/>
+          </a:ln>
+        </p:spPr>
+        <p:txBody>
+          <a:bodyPr spcFirstLastPara="1" wrap="square" lIns="91425" tIns="91425" rIns="91425" bIns="91425" anchor="t" anchorCtr="0">
+            <a:spAutoFit/>
+          </a:bodyPr>
+          <a:lstStyle/>
+          <a:p>
+            <a:pPr marL="0" lvl="0" indent="0" algn="l" rtl="0">
+              <a:lnSpc>
+                <a:spcPct val="100000"/>
+              </a:lnSpc>
+              <a:spcBef>
+                <a:spcPts val="0"/>
+              </a:spcBef>
+              <a:spcAft>
+                <a:spcPts val="400"/>
+              </a:spcAft>
+              <a:buNone/>
+            </a:pPr>
+            <a:r>
+              <a:rPr lang="fr" sz="2800" b="1" dirty="0">
+                <a:solidFill>
+                  <a:schemeClr val="lt1"/>
+                </a:solidFill>
+                <a:latin typeface="Montserrat"/>
+                <a:ea typeface="Montserrat"/>
+                <a:cs typeface="Montserrat"/>
+                <a:sym typeface="Montserrat"/>
+              </a:rPr>
+              <a:t>A VENIR </a:t>
+            </a:r>
+            <a:endParaRPr sz="2800" b="1" dirty="0">
+              <a:solidFill>
+                <a:schemeClr val="lt1"/>
+              </a:solidFill>
+              <a:latin typeface="Montserrat"/>
+              <a:ea typeface="Montserrat"/>
+              <a:cs typeface="Montserrat"/>
+              <a:sym typeface="Montserrat"/>
+            </a:endParaRPr>
+          </a:p>
+        </p:txBody>
+      </p:sp>
+      <p:sp>
+        <p:nvSpPr>
+          <p:cNvPr id="2" name="ZoneTexte 1">
+            <a:extLst>
+              <a:ext uri="{FF2B5EF4-FFF2-40B4-BE49-F238E27FC236}">
+                <a16:creationId xmlns:a16="http://schemas.microsoft.com/office/drawing/2014/main" xmlns="" id="{C43E3EB4-E970-6683-4E57-CE91E6270272}"/>
+              </a:ext>
+            </a:extLst>
+          </p:cNvPr>
+          <p:cNvSpPr txBox="1"/>
+          <p:nvPr/>
+        </p:nvSpPr>
+        <p:spPr>
+          <a:xfrm>
+            <a:off x="612322" y="4597622"/>
+            <a:ext cx="261257" cy="707886"/>
+          </a:xfrm>
+          <a:prstGeom prst="rect">
+            <a:avLst/>
+          </a:prstGeom>
+          <a:noFill/>
+        </p:spPr>
+        <p:txBody>
+          <a:bodyPr wrap="square">
+            <a:spAutoFit/>
+          </a:bodyPr>
+          <a:lstStyle/>
+          <a:p>
+            <a:r>
+              <a:rPr lang="fr-CM" sz="2000" b="1" dirty="0">
+                <a:latin typeface="Aharoni" panose="020F0502020204030204" pitchFamily="2" charset="-79"/>
+                <a:cs typeface="Aharoni" panose="020F0502020204030204" pitchFamily="2" charset="-79"/>
+              </a:rPr>
+              <a:t>8</a:t>
+            </a:r>
+          </a:p>
+          <a:p>
+            <a:endParaRPr lang="fr-CM" sz="2000" b="1" dirty="0">
+              <a:latin typeface="Aharoni" panose="020F0502020204030204" pitchFamily="2" charset="-79"/>
+              <a:cs typeface="Aharoni" panose="020F0502020204030204" pitchFamily="2" charset="-79"/>
+            </a:endParaRPr>
+          </a:p>
+        </p:txBody>
+      </p:sp>
+      <p:sp>
+        <p:nvSpPr>
+          <p:cNvPr id="6" name="Google Shape;233;p38">
+            <a:extLst>
+              <a:ext uri="{FF2B5EF4-FFF2-40B4-BE49-F238E27FC236}">
+                <a16:creationId xmlns:a16="http://schemas.microsoft.com/office/drawing/2014/main" xmlns="" id="{E43149D2-1B55-53DF-1C68-44D9170DB9B3}"/>
+              </a:ext>
+            </a:extLst>
+          </p:cNvPr>
+          <p:cNvSpPr txBox="1"/>
+          <p:nvPr/>
+        </p:nvSpPr>
+        <p:spPr>
+          <a:xfrm>
+            <a:off x="2633437" y="2734321"/>
+            <a:ext cx="4056857" cy="974595"/>
+          </a:xfrm>
+          <a:prstGeom prst="rect">
+            <a:avLst/>
+          </a:prstGeom>
+          <a:noFill/>
+          <a:ln>
+            <a:noFill/>
+          </a:ln>
+        </p:spPr>
+        <p:txBody>
+          <a:bodyPr spcFirstLastPara="1" wrap="square" lIns="91425" tIns="91425" rIns="91425" bIns="91425" anchor="t" anchorCtr="0">
+            <a:spAutoFit/>
+          </a:bodyPr>
+          <a:lstStyle/>
+          <a:p>
+            <a:pPr marL="0" lvl="0" indent="0" algn="l" rtl="0">
+              <a:lnSpc>
+                <a:spcPct val="100000"/>
+              </a:lnSpc>
+              <a:spcBef>
+                <a:spcPts val="0"/>
+              </a:spcBef>
+              <a:spcAft>
+                <a:spcPts val="400"/>
+              </a:spcAft>
+              <a:buNone/>
+            </a:pPr>
+            <a:r>
+              <a:rPr lang="fr" sz="1600" dirty="0">
+                <a:solidFill>
+                  <a:srgbClr val="636366"/>
+                </a:solidFill>
+                <a:latin typeface="Montserrat"/>
+                <a:ea typeface="Montserrat"/>
+                <a:cs typeface="Montserrat"/>
+                <a:sym typeface="Montserrat"/>
+              </a:rPr>
+              <a:t>Ajout des modèles isotropes et angulaires pour la génération de surface</a:t>
+            </a:r>
+            <a:endParaRPr sz="1600" dirty="0">
+              <a:solidFill>
+                <a:srgbClr val="636366"/>
+              </a:solidFill>
+              <a:latin typeface="Montserrat"/>
+              <a:ea typeface="Montserrat"/>
+              <a:cs typeface="Montserrat"/>
+              <a:sym typeface="Montserrat"/>
+            </a:endParaRPr>
+          </a:p>
+        </p:txBody>
+      </p:sp>
+    </p:spTree>
+    <p:extLst>
+      <p:ext uri="{BB962C8B-B14F-4D97-AF65-F5344CB8AC3E}">
+        <p14:creationId xmlns:p14="http://schemas.microsoft.com/office/powerpoint/2010/main" val="784953006"/>
+      </p:ext>
+    </p:extLst>
+  </p:cSld>
+  <p:clrMapOvr>
+    <a:masterClrMapping/>
+  </p:clrMapOvr>
+</p:sld>
+</file>
+
+<file path=ppt/slides/slide11.xml><?xml version="1.0" encoding="utf-8"?>
 <p:sld xmlns:a="http://schemas.openxmlformats.org/drawingml/2006/main" xmlns:r="http://schemas.openxmlformats.org/officeDocument/2006/relationships" xmlns:p="http://schemas.openxmlformats.org/presentationml/2006/main">
   <p:cSld>
     <p:spTree>
@@ -7898,7 +8509,7 @@
         </p:nvSpPr>
         <p:spPr>
           <a:xfrm>
-            <a:off x="3909188" y="661251"/>
+            <a:off x="3909188" y="344259"/>
             <a:ext cx="594900" cy="866874"/>
           </a:xfrm>
           <a:prstGeom prst="rect">
@@ -7959,8 +8570,8 @@
         </p:nvSpPr>
         <p:spPr>
           <a:xfrm>
-            <a:off x="4457300" y="794275"/>
-            <a:ext cx="3180547" cy="625269"/>
+            <a:off x="4457300" y="428515"/>
+            <a:ext cx="4274125" cy="625269"/>
           </a:xfrm>
           <a:prstGeom prst="rect">
             <a:avLst/>
@@ -7989,7 +8600,7 @@
               <a:buNone/>
             </a:pPr>
             <a:r>
-              <a:rPr lang="fr" sz="2200" b="1" dirty="0">
+              <a:rPr lang="fr" sz="2200" b="1" dirty="0" smtClean="0">
                 <a:solidFill>
                   <a:srgbClr val="F39200"/>
                 </a:solidFill>
@@ -7998,7 +8609,7 @@
                 <a:cs typeface="Montserrat"/>
                 <a:sym typeface="Montserrat"/>
               </a:rPr>
-              <a:t>BILAN</a:t>
+              <a:t>OBJECTIF PRINCIPAL</a:t>
             </a:r>
             <a:endParaRPr sz="2200" b="1" dirty="0">
               <a:solidFill>
@@ -8020,8 +8631,8 @@
         </p:nvSpPr>
         <p:spPr>
           <a:xfrm>
-            <a:off x="4424048" y="2011871"/>
-            <a:ext cx="3813121" cy="625269"/>
+            <a:off x="4424048" y="1219391"/>
+            <a:ext cx="4327983" cy="625269"/>
           </a:xfrm>
           <a:prstGeom prst="rect">
             <a:avLst/>
@@ -8037,20 +8648,16 @@
           </a:bodyPr>
           <a:lstStyle/>
           <a:p>
-            <a:pPr marL="0" lvl="0" indent="0" algn="l" rtl="0">
+            <a:pPr lvl="0">
               <a:lnSpc>
                 <a:spcPct val="115000"/>
               </a:lnSpc>
-              <a:spcBef>
-                <a:spcPts val="0"/>
-              </a:spcBef>
               <a:spcAft>
                 <a:spcPts val="400"/>
               </a:spcAft>
-              <a:buNone/>
             </a:pPr>
             <a:r>
-              <a:rPr lang="fr" sz="2200" b="1" dirty="0">
+              <a:rPr lang="fr-FR" sz="2200" b="1" dirty="0" smtClean="0">
                 <a:solidFill>
                   <a:srgbClr val="F39200"/>
                 </a:solidFill>
@@ -8059,9 +8666,9 @@
                 <a:cs typeface="Montserrat"/>
                 <a:sym typeface="Montserrat"/>
               </a:rPr>
-              <a:t>TRAVAUX REALISES</a:t>
+              <a:t>OBJECTIFS DE LA SEMAINE</a:t>
             </a:r>
-            <a:endParaRPr sz="2200" b="1" dirty="0">
+            <a:endParaRPr lang="fr-FR" sz="2200" b="1" dirty="0">
               <a:solidFill>
                 <a:srgbClr val="F39200"/>
               </a:solidFill>
@@ -8078,7 +8685,7 @@
           <p:cNvPr id="2" name="ZoneTexte 1">
             <a:extLst>
               <a:ext uri="{FF2B5EF4-FFF2-40B4-BE49-F238E27FC236}">
-                <a16:creationId xmlns:a16="http://schemas.microsoft.com/office/drawing/2014/main" id="{22878BCD-ACF6-15AB-128E-A6E4087A70EA}"/>
+                <a16:creationId xmlns:a16="http://schemas.microsoft.com/office/drawing/2014/main" xmlns="" id="{22878BCD-ACF6-15AB-128E-A6E4087A70EA}"/>
               </a:ext>
             </a:extLst>
           </p:cNvPr>
@@ -8122,7 +8729,7 @@
           <p:cNvPr id="3" name="Google Shape;184;p36">
             <a:extLst>
               <a:ext uri="{FF2B5EF4-FFF2-40B4-BE49-F238E27FC236}">
-                <a16:creationId xmlns:a16="http://schemas.microsoft.com/office/drawing/2014/main" id="{1437728D-67ED-AAFD-26FE-BFFC6782C770}"/>
+                <a16:creationId xmlns:a16="http://schemas.microsoft.com/office/drawing/2014/main" xmlns="" id="{1437728D-67ED-AAFD-26FE-BFFC6782C770}"/>
               </a:ext>
             </a:extLst>
           </p:cNvPr>
@@ -8131,7 +8738,7 @@
         </p:nvSpPr>
         <p:spPr>
           <a:xfrm>
-            <a:off x="3894065" y="1849149"/>
+            <a:off x="3894065" y="1190781"/>
             <a:ext cx="594900" cy="866874"/>
           </a:xfrm>
           <a:prstGeom prst="rect">
@@ -8189,7 +8796,7 @@
           <p:cNvPr id="4" name="Google Shape;184;p36">
             <a:extLst>
               <a:ext uri="{FF2B5EF4-FFF2-40B4-BE49-F238E27FC236}">
-                <a16:creationId xmlns:a16="http://schemas.microsoft.com/office/drawing/2014/main" id="{7AE75580-E5DF-6EA0-EB63-11A267F60795}"/>
+                <a16:creationId xmlns:a16="http://schemas.microsoft.com/office/drawing/2014/main" xmlns="" id="{7AE75580-E5DF-6EA0-EB63-11A267F60795}"/>
               </a:ext>
             </a:extLst>
           </p:cNvPr>
@@ -8198,7 +8805,7 @@
         </p:nvSpPr>
         <p:spPr>
           <a:xfrm>
-            <a:off x="3909188" y="3199769"/>
+            <a:off x="3909188" y="2090297"/>
             <a:ext cx="594900" cy="866874"/>
           </a:xfrm>
           <a:prstGeom prst="rect">
@@ -8256,7 +8863,7 @@
           <p:cNvPr id="6" name="Google Shape;191;p36">
             <a:extLst>
               <a:ext uri="{FF2B5EF4-FFF2-40B4-BE49-F238E27FC236}">
-                <a16:creationId xmlns:a16="http://schemas.microsoft.com/office/drawing/2014/main" id="{E247FEF7-CEA8-9364-F22A-FBD55FA44957}"/>
+                <a16:creationId xmlns:a16="http://schemas.microsoft.com/office/drawing/2014/main" xmlns="" id="{E247FEF7-CEA8-9364-F22A-FBD55FA44957}"/>
               </a:ext>
             </a:extLst>
           </p:cNvPr>
@@ -8265,8 +8872,71 @@
         </p:nvSpPr>
         <p:spPr>
           <a:xfrm>
-            <a:off x="4424049" y="3320571"/>
+            <a:off x="4424049" y="2113562"/>
             <a:ext cx="3813121" cy="625269"/>
+          </a:xfrm>
+          <a:prstGeom prst="rect">
+            <a:avLst/>
+          </a:prstGeom>
+          <a:noFill/>
+          <a:ln>
+            <a:noFill/>
+          </a:ln>
+        </p:spPr>
+        <p:txBody>
+          <a:bodyPr spcFirstLastPara="1" wrap="square" lIns="91425" tIns="91425" rIns="91425" bIns="91425" anchor="t" anchorCtr="0">
+            <a:spAutoFit/>
+          </a:bodyPr>
+          <a:lstStyle/>
+          <a:p>
+            <a:pPr lvl="0">
+              <a:lnSpc>
+                <a:spcPct val="115000"/>
+              </a:lnSpc>
+              <a:spcAft>
+                <a:spcPts val="400"/>
+              </a:spcAft>
+            </a:pPr>
+            <a:r>
+              <a:rPr lang="fr-FR" sz="2200" b="1" dirty="0">
+                <a:solidFill>
+                  <a:srgbClr val="F39200"/>
+                </a:solidFill>
+                <a:latin typeface="Montserrat"/>
+                <a:ea typeface="Montserrat"/>
+                <a:cs typeface="Montserrat"/>
+                <a:sym typeface="Montserrat"/>
+              </a:rPr>
+              <a:t>TRAVAUX REALISES</a:t>
+            </a:r>
+            <a:endParaRPr lang="fr-FR" sz="2200" b="1" dirty="0">
+              <a:solidFill>
+                <a:srgbClr val="F39200"/>
+              </a:solidFill>
+              <a:latin typeface="Montserrat"/>
+              <a:ea typeface="Montserrat"/>
+              <a:cs typeface="Montserrat"/>
+              <a:sym typeface="Montserrat"/>
+            </a:endParaRPr>
+          </a:p>
+        </p:txBody>
+      </p:sp>
+      <p:sp>
+        <p:nvSpPr>
+          <p:cNvPr id="13" name="Google Shape;184;p36">
+            <a:extLst>
+              <a:ext uri="{FF2B5EF4-FFF2-40B4-BE49-F238E27FC236}">
+                <a16:creationId xmlns:a16="http://schemas.microsoft.com/office/drawing/2014/main" xmlns="" id="{7AE75580-E5DF-6EA0-EB63-11A267F60795}"/>
+              </a:ext>
+            </a:extLst>
+          </p:cNvPr>
+          <p:cNvSpPr txBox="1"/>
+          <p:nvPr/>
+        </p:nvSpPr>
+        <p:spPr>
+          <a:xfrm>
+            <a:off x="3892632" y="2899282"/>
+            <a:ext cx="594900" cy="866874"/>
           </a:xfrm>
           <a:prstGeom prst="rect">
             <a:avLst/>
@@ -8284,7 +8954,7 @@
           <a:p>
             <a:pPr marL="0" lvl="0" indent="0" algn="l" rtl="0">
               <a:lnSpc>
-                <a:spcPct val="115000"/>
+                <a:spcPct val="100000"/>
               </a:lnSpc>
               <a:spcBef>
                 <a:spcPts val="0"/>
@@ -8295,7 +8965,7 @@
               <a:buNone/>
             </a:pPr>
             <a:r>
-              <a:rPr lang="fr" sz="2200" b="1" dirty="0">
+              <a:rPr lang="fr" sz="4100" b="1" dirty="0">
                 <a:solidFill>
                   <a:srgbClr val="F39200"/>
                 </a:solidFill>
@@ -8304,9 +8974,72 @@
                 <a:cs typeface="Montserrat"/>
                 <a:sym typeface="Montserrat"/>
               </a:rPr>
-              <a:t>A VENIR </a:t>
+              <a:t>4</a:t>
             </a:r>
-            <a:endParaRPr sz="2200" b="1" dirty="0">
+            <a:endParaRPr sz="4100" b="1" dirty="0">
+              <a:solidFill>
+                <a:srgbClr val="F39200"/>
+              </a:solidFill>
+              <a:latin typeface="Montserrat"/>
+              <a:ea typeface="Montserrat"/>
+              <a:cs typeface="Montserrat"/>
+              <a:sym typeface="Montserrat"/>
+            </a:endParaRPr>
+          </a:p>
+        </p:txBody>
+      </p:sp>
+      <p:sp>
+        <p:nvSpPr>
+          <p:cNvPr id="15" name="Google Shape;191;p36">
+            <a:extLst>
+              <a:ext uri="{FF2B5EF4-FFF2-40B4-BE49-F238E27FC236}">
+                <a16:creationId xmlns:a16="http://schemas.microsoft.com/office/drawing/2014/main" xmlns="" id="{E247FEF7-CEA8-9364-F22A-FBD55FA44957}"/>
+              </a:ext>
+            </a:extLst>
+          </p:cNvPr>
+          <p:cNvSpPr txBox="1"/>
+          <p:nvPr/>
+        </p:nvSpPr>
+        <p:spPr>
+          <a:xfrm>
+            <a:off x="4457300" y="3059383"/>
+            <a:ext cx="3813121" cy="625269"/>
+          </a:xfrm>
+          <a:prstGeom prst="rect">
+            <a:avLst/>
+          </a:prstGeom>
+          <a:noFill/>
+          <a:ln>
+            <a:noFill/>
+          </a:ln>
+        </p:spPr>
+        <p:txBody>
+          <a:bodyPr spcFirstLastPara="1" wrap="square" lIns="91425" tIns="91425" rIns="91425" bIns="91425" anchor="t" anchorCtr="0">
+            <a:spAutoFit/>
+          </a:bodyPr>
+          <a:lstStyle/>
+          <a:p>
+            <a:pPr lvl="0">
+              <a:lnSpc>
+                <a:spcPct val="115000"/>
+              </a:lnSpc>
+              <a:spcAft>
+                <a:spcPts val="400"/>
+              </a:spcAft>
+            </a:pPr>
+            <a:r>
+              <a:rPr lang="fr-CA" sz="2200" b="1" dirty="0" smtClean="0">
+                <a:solidFill>
+                  <a:srgbClr val="F39200"/>
+                </a:solidFill>
+                <a:latin typeface="Montserrat"/>
+                <a:ea typeface="Montserrat"/>
+                <a:cs typeface="Montserrat"/>
+                <a:sym typeface="Montserrat"/>
+              </a:rPr>
+              <a:t>CE QUI RESTE A FAIRE</a:t>
+            </a:r>
+            <a:endParaRPr lang="fr-FR" sz="2200" b="1" dirty="0">
               <a:solidFill>
                 <a:srgbClr val="F39200"/>
               </a:solidFill>
@@ -8610,7 +9343,7 @@
           <p:cNvPr id="2" name="Google Shape;272;p40">
             <a:extLst>
               <a:ext uri="{FF2B5EF4-FFF2-40B4-BE49-F238E27FC236}">
-                <a16:creationId xmlns:a16="http://schemas.microsoft.com/office/drawing/2014/main" id="{4D003C2F-3386-71E6-B25D-2F94677C17C7}"/>
+                <a16:creationId xmlns:a16="http://schemas.microsoft.com/office/drawing/2014/main" xmlns="" id="{4D003C2F-3386-71E6-B25D-2F94677C17C7}"/>
               </a:ext>
             </a:extLst>
           </p:cNvPr>
@@ -8619,8 +9352,8 @@
         </p:nvSpPr>
         <p:spPr>
           <a:xfrm>
-            <a:off x="2165539" y="1480883"/>
-            <a:ext cx="4886100" cy="892522"/>
+            <a:off x="438525" y="1480883"/>
+            <a:ext cx="6613114" cy="1600408"/>
           </a:xfrm>
           <a:prstGeom prst="rect">
             <a:avLst/>
@@ -8636,30 +9369,39 @@
           </a:bodyPr>
           <a:lstStyle/>
           <a:p>
-            <a:pPr marL="0" lvl="0" indent="0" algn="ctr" rtl="0">
+            <a:pPr algn="ctr">
               <a:lnSpc>
                 <a:spcPct val="115000"/>
               </a:lnSpc>
-              <a:spcBef>
-                <a:spcPts val="0"/>
-              </a:spcBef>
-              <a:spcAft>
-                <a:spcPts val="0"/>
-              </a:spcAft>
-              <a:buNone/>
             </a:pPr>
             <a:r>
-              <a:rPr lang="fr" sz="4000" b="1" dirty="0">
+              <a:rPr lang="fr-FR" sz="4000" b="1" dirty="0">
                 <a:solidFill>
-                  <a:srgbClr val="636366"/>
+                  <a:schemeClr val="bg1">
+                    <a:lumMod val="50000"/>
+                  </a:schemeClr>
                 </a:solidFill>
                 <a:latin typeface="Montserrat"/>
                 <a:ea typeface="Montserrat"/>
                 <a:cs typeface="Montserrat"/>
                 <a:sym typeface="Montserrat"/>
               </a:rPr>
-              <a:t>BILAN</a:t>
+              <a:t>OBJECTIF PRINCIPAL</a:t>
             </a:r>
+          </a:p>
+          <a:p>
+            <a:pPr marL="0" lvl="0" indent="0" algn="ctr" rtl="0">
+              <a:lnSpc>
+                <a:spcPct val="115000"/>
+              </a:lnSpc>
+              <a:spcBef>
+                <a:spcPts val="0"/>
+              </a:spcBef>
+              <a:spcAft>
+                <a:spcPts val="0"/>
+              </a:spcAft>
+              <a:buNone/>
+            </a:pPr>
             <a:endParaRPr sz="4000" dirty="0">
               <a:solidFill>
                 <a:srgbClr val="F39200"/>
@@ -8677,7 +9419,7 @@
           <p:cNvPr id="8" name="ZoneTexte 7">
             <a:extLst>
               <a:ext uri="{FF2B5EF4-FFF2-40B4-BE49-F238E27FC236}">
-                <a16:creationId xmlns:a16="http://schemas.microsoft.com/office/drawing/2014/main" id="{09D139B3-B71C-2712-1480-1C4ED361F9F1}"/>
+                <a16:creationId xmlns:a16="http://schemas.microsoft.com/office/drawing/2014/main" xmlns="" id="{09D139B3-B71C-2712-1480-1C4ED361F9F1}"/>
               </a:ext>
             </a:extLst>
           </p:cNvPr>
@@ -8737,84 +9479,10 @@
       </p:grpSpPr>
       <p:sp>
         <p:nvSpPr>
-          <p:cNvPr id="3" name="Espace réservé du texte 2">
-            <a:extLst>
-              <a:ext uri="{FF2B5EF4-FFF2-40B4-BE49-F238E27FC236}">
-                <a16:creationId xmlns:a16="http://schemas.microsoft.com/office/drawing/2014/main" id="{E97FE33F-EE0E-6595-3566-84E2E71EE685}"/>
-              </a:ext>
-            </a:extLst>
-          </p:cNvPr>
-          <p:cNvSpPr>
-            <a:spLocks noGrp="1"/>
-          </p:cNvSpPr>
-          <p:nvPr>
-            <p:ph type="body" idx="1"/>
-          </p:nvPr>
-        </p:nvSpPr>
-        <p:spPr/>
-        <p:txBody>
-          <a:bodyPr>
-            <a:normAutofit/>
-          </a:bodyPr>
-          <a:lstStyle/>
-          <a:p>
-            <a:pPr marL="514350" indent="-285750">
-              <a:buFont typeface="Arial" panose="020B0604020202020204" pitchFamily="34" charset="0"/>
-              <a:buChar char="•"/>
-            </a:pPr>
-            <a:r>
-              <a:rPr lang="fr-CM" b="1" dirty="0"/>
-              <a:t>Validation des modèles (semi-empiriques)</a:t>
-            </a:r>
-          </a:p>
-          <a:p>
-            <a:pPr marL="514350" indent="-285750">
-              <a:buFont typeface="Arial" panose="020B0604020202020204" pitchFamily="34" charset="0"/>
-              <a:buChar char="•"/>
-            </a:pPr>
-            <a:r>
-              <a:rPr lang="fr-CM" b="1" dirty="0"/>
-              <a:t>Choix de la technologie de développement de l’interface (GUI Toolbox de MATLAB)</a:t>
-            </a:r>
-          </a:p>
-          <a:p>
-            <a:pPr marL="514350" indent="-285750">
-              <a:buFont typeface="Arial" panose="020B0604020202020204" pitchFamily="34" charset="0"/>
-              <a:buChar char="•"/>
-            </a:pPr>
-            <a:r>
-              <a:rPr lang="fr-CM" b="1" dirty="0"/>
-              <a:t>Développement du squelette de l’interface </a:t>
-            </a:r>
-          </a:p>
-          <a:p>
-            <a:pPr marL="514350" indent="-285750">
-              <a:buFont typeface="Arial" panose="020B0604020202020204" pitchFamily="34" charset="0"/>
-              <a:buChar char="•"/>
-            </a:pPr>
-            <a:r>
-              <a:rPr lang="fr-CM" b="1" dirty="0"/>
-              <a:t>Ajout progressif des modèles semi-empiriques et expérimentaux </a:t>
-            </a:r>
-          </a:p>
-          <a:p>
-            <a:pPr marL="514350" indent="-285750">
-              <a:buFont typeface="Arial" panose="020B0604020202020204" pitchFamily="34" charset="0"/>
-              <a:buChar char="•"/>
-            </a:pPr>
-            <a:r>
-              <a:rPr lang="fr-CM" b="1" dirty="0"/>
-              <a:t>Ajustement  progressif de l’interface…</a:t>
-            </a:r>
-          </a:p>
-        </p:txBody>
-      </p:sp>
-      <p:sp>
-        <p:nvSpPr>
           <p:cNvPr id="4" name="Espace réservé du texte 3">
             <a:extLst>
               <a:ext uri="{FF2B5EF4-FFF2-40B4-BE49-F238E27FC236}">
-                <a16:creationId xmlns:a16="http://schemas.microsoft.com/office/drawing/2014/main" id="{DE431819-5224-6127-7474-2B7032D95658}"/>
+                <a16:creationId xmlns:a16="http://schemas.microsoft.com/office/drawing/2014/main" xmlns="" id="{DE431819-5224-6127-7474-2B7032D95658}"/>
               </a:ext>
             </a:extLst>
           </p:cNvPr>
@@ -8858,7 +9526,7 @@
           <p:cNvPr id="2" name="Titre 1">
             <a:extLst>
               <a:ext uri="{FF2B5EF4-FFF2-40B4-BE49-F238E27FC236}">
-                <a16:creationId xmlns:a16="http://schemas.microsoft.com/office/drawing/2014/main" id="{4D2E3858-F9EE-B384-CD95-75748071BC7B}"/>
+                <a16:creationId xmlns:a16="http://schemas.microsoft.com/office/drawing/2014/main" xmlns="" id="{4D2E3858-F9EE-B384-CD95-75748071BC7B}"/>
               </a:ext>
             </a:extLst>
           </p:cNvPr>
@@ -8881,10 +9549,580 @@
           </a:bodyPr>
           <a:lstStyle/>
           <a:p>
+            <a:pPr algn="ctr">
+              <a:lnSpc>
+                <a:spcPct val="115000"/>
+              </a:lnSpc>
+            </a:pPr>
             <a:r>
-              <a:rPr lang="fr-CM" dirty="0"/>
-              <a:t>BILAN</a:t>
+              <a:rPr lang="fr-FR" b="1" dirty="0">
+                <a:solidFill>
+                  <a:schemeClr val="tx1"/>
+                </a:solidFill>
+                <a:latin typeface="Montserrat"/>
+                <a:ea typeface="Montserrat"/>
+                <a:cs typeface="Montserrat"/>
+                <a:sym typeface="Montserrat"/>
+              </a:rPr>
+              <a:t>OBJECTIF PRINCIPAL</a:t>
             </a:r>
+            <a:endParaRPr lang="fr-FR" b="1" dirty="0">
+              <a:solidFill>
+                <a:schemeClr val="tx1"/>
+              </a:solidFill>
+              <a:latin typeface="Montserrat"/>
+              <a:ea typeface="Montserrat"/>
+              <a:cs typeface="Montserrat"/>
+              <a:sym typeface="Montserrat"/>
+            </a:endParaRPr>
+          </a:p>
+        </p:txBody>
+      </p:sp>
+      <p:sp>
+        <p:nvSpPr>
+          <p:cNvPr id="9" name="Text 2"/>
+          <p:cNvSpPr/>
+          <p:nvPr/>
+        </p:nvSpPr>
+        <p:spPr>
+          <a:xfrm>
+            <a:off x="365760" y="182880"/>
+            <a:ext cx="8229600" cy="640080"/>
+          </a:xfrm>
+          <a:prstGeom prst="rect">
+            <a:avLst/>
+          </a:prstGeom>
+          <a:noFill/>
+          <a:ln/>
+        </p:spPr>
+        <p:txBody>
+          <a:bodyPr wrap="square" lIns="0" tIns="0" rIns="0" bIns="0" rtlCol="0" anchor="ctr"/>
+          <a:lstStyle/>
+          <a:p>
+            <a:pPr marL="0" indent="0">
+              <a:buNone/>
+            </a:pPr>
+            <a:endParaRPr lang="en-US" sz="2800" dirty="0"/>
+          </a:p>
+        </p:txBody>
+      </p:sp>
+      <p:sp>
+        <p:nvSpPr>
+          <p:cNvPr id="10" name="Shape 3"/>
+          <p:cNvSpPr/>
+          <p:nvPr/>
+        </p:nvSpPr>
+        <p:spPr>
+          <a:xfrm>
+            <a:off x="320040" y="1280160"/>
+            <a:ext cx="2651760" cy="3291840"/>
+          </a:xfrm>
+          <a:prstGeom prst="rect">
+            <a:avLst/>
+          </a:prstGeom>
+          <a:solidFill>
+            <a:srgbClr val="FFFFFF"/>
+          </a:solidFill>
+          <a:ln w="12700">
+            <a:solidFill>
+              <a:srgbClr val="D1D5DB"/>
+            </a:solidFill>
+            <a:prstDash val="solid"/>
+          </a:ln>
+          <a:effectLst>
+            <a:outerShdw blurRad="101600" dist="38100" dir="8100000" algn="bl" rotWithShape="0">
+              <a:srgbClr val="000000">
+                <a:alpha val="15000"/>
+              </a:srgbClr>
+            </a:outerShdw>
+          </a:effectLst>
+        </p:spPr>
+        <p:txBody>
+          <a:bodyPr/>
+          <a:lstStyle/>
+          <a:p>
+            <a:endParaRPr lang="fr-FR" dirty="0"/>
+          </a:p>
+        </p:txBody>
+      </p:sp>
+      <p:sp>
+        <p:nvSpPr>
+          <p:cNvPr id="11" name="Shape 4"/>
+          <p:cNvSpPr/>
+          <p:nvPr/>
+        </p:nvSpPr>
+        <p:spPr>
+          <a:xfrm>
+            <a:off x="320040" y="1280160"/>
+            <a:ext cx="2651760" cy="109728"/>
+          </a:xfrm>
+          <a:prstGeom prst="rect">
+            <a:avLst/>
+          </a:prstGeom>
+          <a:solidFill>
+            <a:schemeClr val="accent4"/>
+          </a:solidFill>
+          <a:ln w="12700">
+            <a:solidFill>
+              <a:srgbClr val="0E7490"/>
+            </a:solidFill>
+            <a:prstDash val="solid"/>
+          </a:ln>
+        </p:spPr>
+      </p:sp>
+      <p:sp>
+        <p:nvSpPr>
+          <p:cNvPr id="12" name="Text 5"/>
+          <p:cNvSpPr/>
+          <p:nvPr/>
+        </p:nvSpPr>
+        <p:spPr>
+          <a:xfrm>
+            <a:off x="411480" y="1417320"/>
+            <a:ext cx="2468880" cy="594360"/>
+          </a:xfrm>
+          <a:prstGeom prst="rect">
+            <a:avLst/>
+          </a:prstGeom>
+          <a:noFill/>
+          <a:ln/>
+        </p:spPr>
+        <p:txBody>
+          <a:bodyPr wrap="square" lIns="0" tIns="0" rIns="0" bIns="0" rtlCol="0" anchor="ctr"/>
+          <a:lstStyle/>
+          <a:p>
+            <a:pPr marL="0" indent="0" algn="ctr">
+              <a:buNone/>
+            </a:pPr>
+            <a:r>
+              <a:rPr lang="en-US" sz="2800" dirty="0">
+                <a:solidFill>
+                  <a:srgbClr val="000000"/>
+                </a:solidFill>
+              </a:rPr>
+              <a:t>⚙️</a:t>
+            </a:r>
+            <a:endParaRPr lang="en-US" sz="2800" dirty="0"/>
+          </a:p>
+        </p:txBody>
+      </p:sp>
+      <p:sp>
+        <p:nvSpPr>
+          <p:cNvPr id="13" name="Text 6"/>
+          <p:cNvSpPr/>
+          <p:nvPr/>
+        </p:nvSpPr>
+        <p:spPr>
+          <a:xfrm>
+            <a:off x="411480" y="2011680"/>
+            <a:ext cx="2468880" cy="548640"/>
+          </a:xfrm>
+          <a:prstGeom prst="rect">
+            <a:avLst/>
+          </a:prstGeom>
+          <a:noFill/>
+          <a:ln/>
+        </p:spPr>
+        <p:txBody>
+          <a:bodyPr wrap="square" lIns="0" tIns="0" rIns="0" bIns="0" rtlCol="0" anchor="ctr"/>
+          <a:lstStyle/>
+          <a:p>
+            <a:pPr marL="0" indent="0" algn="ctr">
+              <a:buNone/>
+            </a:pPr>
+            <a:r>
+              <a:rPr lang="en-US" sz="1400" b="1" dirty="0">
+                <a:solidFill>
+                  <a:srgbClr val="0D2B55"/>
+                </a:solidFill>
+                <a:latin typeface="Calibri" pitchFamily="34" charset="0"/>
+                <a:ea typeface="Calibri" pitchFamily="34" charset="-122"/>
+                <a:cs typeface="Calibri" pitchFamily="34" charset="-120"/>
+              </a:rPr>
+              <a:t>Reproduire l'Interface</a:t>
+            </a:r>
+            <a:endParaRPr lang="en-US" sz="1400" dirty="0"/>
+          </a:p>
+        </p:txBody>
+      </p:sp>
+      <p:sp>
+        <p:nvSpPr>
+          <p:cNvPr id="14" name="Text 7"/>
+          <p:cNvSpPr/>
+          <p:nvPr/>
+        </p:nvSpPr>
+        <p:spPr>
+          <a:xfrm>
+            <a:off x="457200" y="2606040"/>
+            <a:ext cx="2377440" cy="1737360"/>
+          </a:xfrm>
+          <a:prstGeom prst="rect">
+            <a:avLst/>
+          </a:prstGeom>
+          <a:noFill/>
+          <a:ln/>
+        </p:spPr>
+        <p:txBody>
+          <a:bodyPr wrap="square" lIns="0" tIns="0" rIns="0" bIns="0" rtlCol="0" anchor="t"/>
+          <a:lstStyle/>
+          <a:p>
+            <a:pPr marL="0" indent="0" algn="l">
+              <a:buNone/>
+            </a:pPr>
+            <a:r>
+              <a:rPr lang="en-US" sz="1100" dirty="0">
+                <a:solidFill>
+                  <a:srgbClr val="374151"/>
+                </a:solidFill>
+                <a:latin typeface="Calibri" pitchFamily="34" charset="0"/>
+                <a:ea typeface="Calibri" pitchFamily="34" charset="-122"/>
+                <a:cs typeface="Calibri" pitchFamily="34" charset="-120"/>
+              </a:rPr>
+              <a:t>Recréer avec App Designer l'interface développée avec GUI Layout Toolbox en conservant exactement les mêmes fonctionnalités</a:t>
+            </a:r>
+            <a:endParaRPr lang="en-US" sz="1100" dirty="0"/>
+          </a:p>
+        </p:txBody>
+      </p:sp>
+      <p:sp>
+        <p:nvSpPr>
+          <p:cNvPr id="15" name="Shape 8"/>
+          <p:cNvSpPr/>
+          <p:nvPr/>
+        </p:nvSpPr>
+        <p:spPr>
+          <a:xfrm>
+            <a:off x="3200400" y="1280160"/>
+            <a:ext cx="2651760" cy="3291840"/>
+          </a:xfrm>
+          <a:prstGeom prst="rect">
+            <a:avLst/>
+          </a:prstGeom>
+          <a:solidFill>
+            <a:srgbClr val="FFFFFF"/>
+          </a:solidFill>
+          <a:ln w="12700">
+            <a:solidFill>
+              <a:srgbClr val="D1D5DB"/>
+            </a:solidFill>
+            <a:prstDash val="solid"/>
+          </a:ln>
+          <a:effectLst>
+            <a:outerShdw blurRad="101600" dist="38100" dir="8100000" algn="bl" rotWithShape="0">
+              <a:srgbClr val="000000">
+                <a:alpha val="15000"/>
+              </a:srgbClr>
+            </a:outerShdw>
+          </a:effectLst>
+        </p:spPr>
+      </p:sp>
+      <p:sp>
+        <p:nvSpPr>
+          <p:cNvPr id="16" name="Shape 9"/>
+          <p:cNvSpPr/>
+          <p:nvPr/>
+        </p:nvSpPr>
+        <p:spPr>
+          <a:xfrm>
+            <a:off x="3200400" y="1280160"/>
+            <a:ext cx="2651760" cy="109728"/>
+          </a:xfrm>
+          <a:prstGeom prst="rect">
+            <a:avLst/>
+          </a:prstGeom>
+          <a:solidFill>
+            <a:schemeClr val="accent4"/>
+          </a:solidFill>
+          <a:ln w="12700">
+            <a:solidFill>
+              <a:srgbClr val="0E7490"/>
+            </a:solidFill>
+            <a:prstDash val="solid"/>
+          </a:ln>
+        </p:spPr>
+      </p:sp>
+      <p:sp>
+        <p:nvSpPr>
+          <p:cNvPr id="17" name="Text 10"/>
+          <p:cNvSpPr/>
+          <p:nvPr/>
+        </p:nvSpPr>
+        <p:spPr>
+          <a:xfrm>
+            <a:off x="3291840" y="1417320"/>
+            <a:ext cx="2468880" cy="594360"/>
+          </a:xfrm>
+          <a:prstGeom prst="rect">
+            <a:avLst/>
+          </a:prstGeom>
+          <a:noFill/>
+          <a:ln/>
+        </p:spPr>
+        <p:txBody>
+          <a:bodyPr wrap="square" lIns="0" tIns="0" rIns="0" bIns="0" rtlCol="0" anchor="ctr"/>
+          <a:lstStyle/>
+          <a:p>
+            <a:pPr marL="0" indent="0" algn="ctr">
+              <a:buNone/>
+            </a:pPr>
+            <a:r>
+              <a:rPr lang="en-US" sz="2800" dirty="0">
+                <a:solidFill>
+                  <a:srgbClr val="000000"/>
+                </a:solidFill>
+              </a:rPr>
+              <a:t>🔢</a:t>
+            </a:r>
+            <a:endParaRPr lang="en-US" sz="2800" dirty="0"/>
+          </a:p>
+        </p:txBody>
+      </p:sp>
+      <p:sp>
+        <p:nvSpPr>
+          <p:cNvPr id="18" name="Text 11"/>
+          <p:cNvSpPr/>
+          <p:nvPr/>
+        </p:nvSpPr>
+        <p:spPr>
+          <a:xfrm>
+            <a:off x="3291840" y="2011680"/>
+            <a:ext cx="2468880" cy="548640"/>
+          </a:xfrm>
+          <a:prstGeom prst="rect">
+            <a:avLst/>
+          </a:prstGeom>
+          <a:noFill/>
+          <a:ln/>
+        </p:spPr>
+        <p:txBody>
+          <a:bodyPr wrap="square" lIns="0" tIns="0" rIns="0" bIns="0" rtlCol="0" anchor="ctr"/>
+          <a:lstStyle/>
+          <a:p>
+            <a:pPr marL="0" indent="0" algn="ctr">
+              <a:buNone/>
+            </a:pPr>
+            <a:r>
+              <a:rPr lang="en-US" sz="1400" b="1" dirty="0">
+                <a:solidFill>
+                  <a:srgbClr val="0D2B55"/>
+                </a:solidFill>
+                <a:latin typeface="Calibri" pitchFamily="34" charset="0"/>
+                <a:ea typeface="Calibri" pitchFamily="34" charset="-122"/>
+                <a:cs typeface="Calibri" pitchFamily="34" charset="-120"/>
+              </a:rPr>
+              <a:t>Intégrer les Calculs</a:t>
+            </a:r>
+            <a:endParaRPr lang="en-US" sz="1400" dirty="0"/>
+          </a:p>
+        </p:txBody>
+      </p:sp>
+      <p:sp>
+        <p:nvSpPr>
+          <p:cNvPr id="19" name="Text 12"/>
+          <p:cNvSpPr/>
+          <p:nvPr/>
+        </p:nvSpPr>
+        <p:spPr>
+          <a:xfrm>
+            <a:off x="3337560" y="2606040"/>
+            <a:ext cx="2377440" cy="1737360"/>
+          </a:xfrm>
+          <a:prstGeom prst="rect">
+            <a:avLst/>
+          </a:prstGeom>
+          <a:noFill/>
+          <a:ln/>
+        </p:spPr>
+        <p:txBody>
+          <a:bodyPr wrap="square" lIns="0" tIns="0" rIns="0" bIns="0" rtlCol="0" anchor="t"/>
+          <a:lstStyle/>
+          <a:p>
+            <a:pPr marL="0" indent="0" algn="l">
+              <a:buNone/>
+            </a:pPr>
+            <a:r>
+              <a:rPr lang="en-US" sz="1100" dirty="0">
+                <a:solidFill>
+                  <a:srgbClr val="374151"/>
+                </a:solidFill>
+                <a:latin typeface="Calibri" pitchFamily="34" charset="0"/>
+                <a:ea typeface="Calibri" pitchFamily="34" charset="-122"/>
+                <a:cs typeface="Calibri" pitchFamily="34" charset="-120"/>
+              </a:rPr>
+              <a:t>Intégrer tous les calculs NRCS et de génération de surface de mer dans la nouvelle interface App Designer</a:t>
+            </a:r>
+            <a:endParaRPr lang="en-US" sz="1100" dirty="0"/>
+          </a:p>
+        </p:txBody>
+      </p:sp>
+      <p:sp>
+        <p:nvSpPr>
+          <p:cNvPr id="20" name="Shape 13"/>
+          <p:cNvSpPr/>
+          <p:nvPr/>
+        </p:nvSpPr>
+        <p:spPr>
+          <a:xfrm>
+            <a:off x="6080760" y="1280160"/>
+            <a:ext cx="2651760" cy="3291840"/>
+          </a:xfrm>
+          <a:prstGeom prst="rect">
+            <a:avLst/>
+          </a:prstGeom>
+          <a:solidFill>
+            <a:srgbClr val="FFFFFF"/>
+          </a:solidFill>
+          <a:ln w="12700">
+            <a:solidFill>
+              <a:srgbClr val="D1D5DB"/>
+            </a:solidFill>
+            <a:prstDash val="solid"/>
+          </a:ln>
+          <a:effectLst>
+            <a:outerShdw blurRad="101600" dist="38100" dir="8100000" algn="bl" rotWithShape="0">
+              <a:srgbClr val="000000">
+                <a:alpha val="15000"/>
+              </a:srgbClr>
+            </a:outerShdw>
+          </a:effectLst>
+        </p:spPr>
+      </p:sp>
+      <p:sp>
+        <p:nvSpPr>
+          <p:cNvPr id="21" name="Shape 14"/>
+          <p:cNvSpPr/>
+          <p:nvPr/>
+        </p:nvSpPr>
+        <p:spPr>
+          <a:xfrm>
+            <a:off x="6080760" y="1280160"/>
+            <a:ext cx="2651760" cy="109728"/>
+          </a:xfrm>
+          <a:prstGeom prst="rect">
+            <a:avLst/>
+          </a:prstGeom>
+          <a:solidFill>
+            <a:schemeClr val="accent4"/>
+          </a:solidFill>
+          <a:ln w="12700">
+            <a:solidFill>
+              <a:srgbClr val="0E7490"/>
+            </a:solidFill>
+            <a:prstDash val="solid"/>
+          </a:ln>
+        </p:spPr>
+      </p:sp>
+      <p:sp>
+        <p:nvSpPr>
+          <p:cNvPr id="22" name="Text 15"/>
+          <p:cNvSpPr/>
+          <p:nvPr/>
+        </p:nvSpPr>
+        <p:spPr>
+          <a:xfrm>
+            <a:off x="6172200" y="1417320"/>
+            <a:ext cx="2468880" cy="594360"/>
+          </a:xfrm>
+          <a:prstGeom prst="rect">
+            <a:avLst/>
+          </a:prstGeom>
+          <a:noFill/>
+          <a:ln/>
+        </p:spPr>
+        <p:txBody>
+          <a:bodyPr wrap="square" lIns="0" tIns="0" rIns="0" bIns="0" rtlCol="0" anchor="ctr"/>
+          <a:lstStyle/>
+          <a:p>
+            <a:pPr marL="0" indent="0" algn="ctr">
+              <a:buNone/>
+            </a:pPr>
+            <a:r>
+              <a:rPr lang="en-US" sz="2800" dirty="0">
+                <a:solidFill>
+                  <a:srgbClr val="000000"/>
+                </a:solidFill>
+              </a:rPr>
+              <a:t>🖼️</a:t>
+            </a:r>
+            <a:endParaRPr lang="en-US" sz="2800" dirty="0"/>
+          </a:p>
+        </p:txBody>
+      </p:sp>
+      <p:sp>
+        <p:nvSpPr>
+          <p:cNvPr id="23" name="Text 16"/>
+          <p:cNvSpPr/>
+          <p:nvPr/>
+        </p:nvSpPr>
+        <p:spPr>
+          <a:xfrm>
+            <a:off x="6172200" y="2011680"/>
+            <a:ext cx="2468880" cy="548640"/>
+          </a:xfrm>
+          <a:prstGeom prst="rect">
+            <a:avLst/>
+          </a:prstGeom>
+          <a:noFill/>
+          <a:ln/>
+        </p:spPr>
+        <p:txBody>
+          <a:bodyPr wrap="square" lIns="0" tIns="0" rIns="0" bIns="0" rtlCol="0" anchor="ctr"/>
+          <a:lstStyle/>
+          <a:p>
+            <a:pPr marL="0" indent="0" algn="ctr">
+              <a:buNone/>
+            </a:pPr>
+            <a:r>
+              <a:rPr lang="en-US" sz="1400" b="1" dirty="0">
+                <a:solidFill>
+                  <a:srgbClr val="0D2B55"/>
+                </a:solidFill>
+                <a:latin typeface="Calibri" pitchFamily="34" charset="0"/>
+                <a:ea typeface="Calibri" pitchFamily="34" charset="-122"/>
+                <a:cs typeface="Calibri" pitchFamily="34" charset="-120"/>
+              </a:rPr>
+              <a:t>Interface Améliorée</a:t>
+            </a:r>
+            <a:endParaRPr lang="en-US" sz="1400" dirty="0"/>
+          </a:p>
+        </p:txBody>
+      </p:sp>
+      <p:sp>
+        <p:nvSpPr>
+          <p:cNvPr id="24" name="Text 17"/>
+          <p:cNvSpPr/>
+          <p:nvPr/>
+        </p:nvSpPr>
+        <p:spPr>
+          <a:xfrm>
+            <a:off x="6217920" y="2606040"/>
+            <a:ext cx="2377440" cy="1737360"/>
+          </a:xfrm>
+          <a:prstGeom prst="rect">
+            <a:avLst/>
+          </a:prstGeom>
+          <a:noFill/>
+          <a:ln/>
+        </p:spPr>
+        <p:txBody>
+          <a:bodyPr wrap="square" lIns="0" tIns="0" rIns="0" bIns="0" rtlCol="0" anchor="t"/>
+          <a:lstStyle/>
+          <a:p>
+            <a:pPr marL="0" indent="0" algn="l">
+              <a:buNone/>
+            </a:pPr>
+            <a:r>
+              <a:rPr lang="en-US" sz="1100" dirty="0">
+                <a:solidFill>
+                  <a:srgbClr val="374151"/>
+                </a:solidFill>
+                <a:latin typeface="Calibri" pitchFamily="34" charset="0"/>
+                <a:ea typeface="Calibri" pitchFamily="34" charset="-122"/>
+                <a:cs typeface="Calibri" pitchFamily="34" charset="-120"/>
+              </a:rPr>
+              <a:t>Agrandir les 2 logos pour qu'ils soient visibles et rendre l'interface adaptative selon la taille de la fenêtre</a:t>
+            </a:r>
+            <a:endParaRPr lang="en-US" sz="1100" dirty="0"/>
           </a:p>
         </p:txBody>
       </p:sp>
@@ -8909,7 +10147,7 @@
         <p:cNvPr id="1" name="Shape 270">
           <a:extLst>
             <a:ext uri="{FF2B5EF4-FFF2-40B4-BE49-F238E27FC236}">
-              <a16:creationId xmlns:a16="http://schemas.microsoft.com/office/drawing/2014/main" id="{857A21E4-36FB-45A4-B653-0885D491669B}"/>
+              <a16:creationId xmlns:a16="http://schemas.microsoft.com/office/drawing/2014/main" xmlns="" id="{857A21E4-36FB-45A4-B653-0885D491669B}"/>
             </a:ext>
           </a:extLst>
         </p:cNvPr>
@@ -8929,7 +10167,7 @@
           <p:cNvPr id="271" name="Google Shape;271;p40">
             <a:extLst>
               <a:ext uri="{FF2B5EF4-FFF2-40B4-BE49-F238E27FC236}">
-                <a16:creationId xmlns:a16="http://schemas.microsoft.com/office/drawing/2014/main" id="{48129860-581C-B2D7-2E17-129CA8B245BA}"/>
+                <a16:creationId xmlns:a16="http://schemas.microsoft.com/office/drawing/2014/main" xmlns="" id="{48129860-581C-B2D7-2E17-129CA8B245BA}"/>
               </a:ext>
             </a:extLst>
           </p:cNvPr>
@@ -8963,7 +10201,7 @@
           <p:cNvPr id="273" name="Google Shape;273;p40">
             <a:extLst>
               <a:ext uri="{FF2B5EF4-FFF2-40B4-BE49-F238E27FC236}">
-                <a16:creationId xmlns:a16="http://schemas.microsoft.com/office/drawing/2014/main" id="{F7948FE7-1B59-CF82-E3A3-164F1DEBAF7C}"/>
+                <a16:creationId xmlns:a16="http://schemas.microsoft.com/office/drawing/2014/main" xmlns="" id="{F7948FE7-1B59-CF82-E3A3-164F1DEBAF7C}"/>
               </a:ext>
             </a:extLst>
           </p:cNvPr>
@@ -9030,7 +10268,7 @@
           <p:cNvPr id="2" name="Google Shape;272;p40">
             <a:extLst>
               <a:ext uri="{FF2B5EF4-FFF2-40B4-BE49-F238E27FC236}">
-                <a16:creationId xmlns:a16="http://schemas.microsoft.com/office/drawing/2014/main" id="{D78742D0-C620-9378-FBDD-AB3126D1351B}"/>
+                <a16:creationId xmlns:a16="http://schemas.microsoft.com/office/drawing/2014/main" xmlns="" id="{D78742D0-C620-9378-FBDD-AB3126D1351B}"/>
               </a:ext>
             </a:extLst>
           </p:cNvPr>
@@ -9040,7 +10278,7 @@
         <p:spPr>
           <a:xfrm>
             <a:off x="460146" y="1855163"/>
-            <a:ext cx="6613114" cy="851485"/>
+            <a:ext cx="7598766" cy="943818"/>
           </a:xfrm>
           <a:prstGeom prst="rect">
             <a:avLst/>
@@ -9057,6 +10295,9 @@
           <a:lstStyle/>
           <a:p>
             <a:pPr lvl="0">
+              <a:lnSpc>
+                <a:spcPct val="115000"/>
+              </a:lnSpc>
               <a:spcAft>
                 <a:spcPts val="400"/>
               </a:spcAft>
@@ -9071,8 +10312,17 @@
                 <a:cs typeface="Montserrat"/>
                 <a:sym typeface="Montserrat"/>
               </a:rPr>
-              <a:t>TRAVAUX REALISES</a:t>
+              <a:t>OBJECTIFS DE LA SEMAINE</a:t>
             </a:r>
+            <a:endParaRPr lang="fr-FR" sz="4000" b="1" dirty="0">
+              <a:solidFill>
+                <a:schemeClr val="tx1"/>
+              </a:solidFill>
+              <a:latin typeface="Montserrat"/>
+              <a:ea typeface="Montserrat"/>
+              <a:cs typeface="Montserrat"/>
+              <a:sym typeface="Montserrat"/>
+            </a:endParaRPr>
           </a:p>
         </p:txBody>
       </p:sp>
@@ -9081,7 +10331,7 @@
           <p:cNvPr id="8" name="ZoneTexte 7">
             <a:extLst>
               <a:ext uri="{FF2B5EF4-FFF2-40B4-BE49-F238E27FC236}">
-                <a16:creationId xmlns:a16="http://schemas.microsoft.com/office/drawing/2014/main" id="{F09FD26D-2DE7-631D-8069-47A7455C2F30}"/>
+                <a16:creationId xmlns:a16="http://schemas.microsoft.com/office/drawing/2014/main" xmlns="" id="{F09FD26D-2DE7-631D-8069-47A7455C2F30}"/>
               </a:ext>
             </a:extLst>
           </p:cNvPr>
@@ -9149,7 +10399,7 @@
           <p:cNvPr id="2" name="Titre 1">
             <a:extLst>
               <a:ext uri="{FF2B5EF4-FFF2-40B4-BE49-F238E27FC236}">
-                <a16:creationId xmlns:a16="http://schemas.microsoft.com/office/drawing/2014/main" id="{814C4F5F-A49B-7C82-20E5-295A56B97DC1}"/>
+                <a16:creationId xmlns:a16="http://schemas.microsoft.com/office/drawing/2014/main" xmlns="" id="{814C4F5F-A49B-7C82-20E5-295A56B97DC1}"/>
               </a:ext>
             </a:extLst>
           </p:cNvPr>
@@ -9167,106 +10417,35 @@
           </a:bodyPr>
           <a:lstStyle/>
           <a:p>
-            <a:r>
-              <a:rPr lang="fr-CM" b="1" dirty="0">
-                <a:latin typeface="Montserrat" panose="00000500000000000000" pitchFamily="2" charset="0"/>
-              </a:rPr>
-              <a:t>TRAVAUX REALISES</a:t>
-            </a:r>
-          </a:p>
-        </p:txBody>
-      </p:sp>
-      <p:sp>
-        <p:nvSpPr>
-          <p:cNvPr id="3" name="Espace réservé du texte 2">
-            <a:extLst>
-              <a:ext uri="{FF2B5EF4-FFF2-40B4-BE49-F238E27FC236}">
-                <a16:creationId xmlns:a16="http://schemas.microsoft.com/office/drawing/2014/main" id="{A8A89553-F360-B5AE-6A0D-1F5A858C2E1F}"/>
-              </a:ext>
-            </a:extLst>
-          </p:cNvPr>
-          <p:cNvSpPr>
-            <a:spLocks noGrp="1"/>
-          </p:cNvSpPr>
-          <p:nvPr>
-            <p:ph type="body" idx="1"/>
-          </p:nvPr>
-        </p:nvSpPr>
-        <p:spPr/>
-        <p:txBody>
-          <a:bodyPr>
-            <a:normAutofit/>
-          </a:bodyPr>
-          <a:lstStyle/>
-          <a:p>
+            <a:pPr lvl="0">
+              <a:lnSpc>
+                <a:spcPct val="115000"/>
+              </a:lnSpc>
+              <a:spcAft>
+                <a:spcPts val="400"/>
+              </a:spcAft>
+            </a:pPr>
             <a:r>
               <a:rPr lang="fr-FR" b="1" dirty="0">
                 <a:solidFill>
-                  <a:srgbClr val="636366"/>
+                  <a:schemeClr val="tx1"/>
                 </a:solidFill>
                 <a:latin typeface="Montserrat"/>
                 <a:ea typeface="Montserrat"/>
                 <a:cs typeface="Montserrat"/>
                 <a:sym typeface="Montserrat"/>
               </a:rPr>
-              <a:t>Modifications sur l’interface </a:t>
+              <a:t>OBJECTIFS DE LA SEMAINE</a:t>
             </a:r>
-          </a:p>
-          <a:p>
-            <a:pPr>
-              <a:buFontTx/>
-              <a:buChar char="-"/>
-            </a:pPr>
-            <a:r>
-              <a:rPr lang="fr-CM" dirty="0">
-                <a:latin typeface="Montserrat" panose="00000500000000000000" pitchFamily="2" charset="0"/>
-              </a:rPr>
-              <a:t>Ajustement de la logique d’exportation de plusieurs courbes : le problème venait d’un problème de récupération des vecteurs theta lors de l’importation </a:t>
-            </a:r>
-          </a:p>
-          <a:p>
-            <a:pPr>
-              <a:buFontTx/>
-              <a:buChar char="-"/>
-            </a:pPr>
-            <a:r>
-              <a:rPr lang="fr-CM" dirty="0">
-                <a:latin typeface="Montserrat" panose="00000500000000000000" pitchFamily="2" charset="0"/>
-              </a:rPr>
-              <a:t>Ajout du paramètre ‘ fetch ’ avec pour valeur par défaut ‘ inf ’ et grisée. Il ne sera utilisé que lors de l’implémentation du modèle statistique TSM</a:t>
-            </a:r>
-          </a:p>
-          <a:p>
-            <a:r>
-              <a:rPr lang="fr-FR" b="1" dirty="0">
-                <a:solidFill>
-                  <a:srgbClr val="636366"/>
-                </a:solidFill>
-                <a:latin typeface="Montserrat"/>
-                <a:ea typeface="Montserrat"/>
-                <a:cs typeface="Montserrat"/>
-                <a:sym typeface="Montserrat"/>
-              </a:rPr>
-              <a:t>Transcription des modèles de python vers MATLAB</a:t>
-            </a:r>
-          </a:p>
-          <a:p>
-            <a:pPr marL="114300" indent="0">
-              <a:buNone/>
-            </a:pPr>
-            <a:r>
-              <a:rPr lang="fr-CM" dirty="0">
-                <a:solidFill>
-                  <a:srgbClr val="636366"/>
-                </a:solidFill>
-                <a:latin typeface="Montserrat"/>
-                <a:ea typeface="Montserrat"/>
-                <a:cs typeface="Montserrat"/>
-                <a:sym typeface="Montserrat"/>
-              </a:rPr>
-              <a:t>Transcription du modèle CMOD5N  en MATLAB</a:t>
-            </a:r>
-            <a:endParaRPr lang="fr-CM" dirty="0"/>
+            <a:endParaRPr lang="fr-FR" b="1" dirty="0">
+              <a:solidFill>
+                <a:schemeClr val="tx1"/>
+              </a:solidFill>
+              <a:latin typeface="Montserrat"/>
+              <a:ea typeface="Montserrat"/>
+              <a:cs typeface="Montserrat"/>
+              <a:sym typeface="Montserrat"/>
+            </a:endParaRPr>
           </a:p>
         </p:txBody>
       </p:sp>
@@ -9275,7 +10454,7 @@
           <p:cNvPr id="4" name="ZoneTexte 3">
             <a:extLst>
               <a:ext uri="{FF2B5EF4-FFF2-40B4-BE49-F238E27FC236}">
-                <a16:creationId xmlns:a16="http://schemas.microsoft.com/office/drawing/2014/main" id="{79CA2FA3-BD2C-C620-BF6B-3B73FC658A15}"/>
+                <a16:creationId xmlns:a16="http://schemas.microsoft.com/office/drawing/2014/main" xmlns="" id="{79CA2FA3-BD2C-C620-BF6B-3B73FC658A15}"/>
               </a:ext>
             </a:extLst>
           </p:cNvPr>
@@ -9314,6 +10493,798 @@
           </a:p>
         </p:txBody>
       </p:sp>
+      <p:sp>
+        <p:nvSpPr>
+          <p:cNvPr id="9" name="Shape 3"/>
+          <p:cNvSpPr/>
+          <p:nvPr/>
+        </p:nvSpPr>
+        <p:spPr>
+          <a:xfrm>
+            <a:off x="274320" y="1234440"/>
+            <a:ext cx="8595360" cy="530352"/>
+          </a:xfrm>
+          <a:prstGeom prst="rect">
+            <a:avLst/>
+          </a:prstGeom>
+          <a:solidFill>
+            <a:srgbClr val="FFFFFF"/>
+          </a:solidFill>
+          <a:ln w="12700">
+            <a:solidFill>
+              <a:srgbClr val="E5E7EB"/>
+            </a:solidFill>
+            <a:prstDash val="solid"/>
+          </a:ln>
+          <a:effectLst>
+            <a:outerShdw blurRad="101600" dist="38100" dir="8100000" algn="bl" rotWithShape="0">
+              <a:srgbClr val="000000">
+                <a:alpha val="15000"/>
+              </a:srgbClr>
+            </a:outerShdw>
+          </a:effectLst>
+        </p:spPr>
+      </p:sp>
+      <p:sp>
+        <p:nvSpPr>
+          <p:cNvPr id="10" name="Shape 4"/>
+          <p:cNvSpPr/>
+          <p:nvPr/>
+        </p:nvSpPr>
+        <p:spPr>
+          <a:xfrm>
+            <a:off x="274320" y="1234440"/>
+            <a:ext cx="548640" cy="530352"/>
+          </a:xfrm>
+          <a:prstGeom prst="rect">
+            <a:avLst/>
+          </a:prstGeom>
+          <a:solidFill>
+            <a:srgbClr val="0E7490"/>
+          </a:solidFill>
+          <a:ln w="12700">
+            <a:solidFill>
+              <a:srgbClr val="0E7490"/>
+            </a:solidFill>
+            <a:prstDash val="solid"/>
+          </a:ln>
+        </p:spPr>
+      </p:sp>
+      <p:sp>
+        <p:nvSpPr>
+          <p:cNvPr id="11" name="Text 5"/>
+          <p:cNvSpPr/>
+          <p:nvPr/>
+        </p:nvSpPr>
+        <p:spPr>
+          <a:xfrm>
+            <a:off x="274320" y="1234440"/>
+            <a:ext cx="548640" cy="530352"/>
+          </a:xfrm>
+          <a:prstGeom prst="rect">
+            <a:avLst/>
+          </a:prstGeom>
+          <a:noFill/>
+          <a:ln/>
+        </p:spPr>
+        <p:txBody>
+          <a:bodyPr wrap="square" lIns="0" tIns="0" rIns="0" bIns="0" rtlCol="0" anchor="ctr"/>
+          <a:lstStyle/>
+          <a:p>
+            <a:pPr marL="0" indent="0" algn="ctr">
+              <a:buNone/>
+            </a:pPr>
+            <a:r>
+              <a:rPr lang="en-US" sz="1300" b="1" dirty="0">
+                <a:solidFill>
+                  <a:srgbClr val="FFFFFF"/>
+                </a:solidFill>
+              </a:rPr>
+              <a:t>01</a:t>
+            </a:r>
+            <a:endParaRPr lang="en-US" sz="1300" dirty="0"/>
+          </a:p>
+        </p:txBody>
+      </p:sp>
+      <p:sp>
+        <p:nvSpPr>
+          <p:cNvPr id="12" name="Text 6"/>
+          <p:cNvSpPr/>
+          <p:nvPr/>
+        </p:nvSpPr>
+        <p:spPr>
+          <a:xfrm>
+            <a:off x="960120" y="1280160"/>
+            <a:ext cx="7772400" cy="438912"/>
+          </a:xfrm>
+          <a:prstGeom prst="rect">
+            <a:avLst/>
+          </a:prstGeom>
+          <a:noFill/>
+          <a:ln/>
+        </p:spPr>
+        <p:txBody>
+          <a:bodyPr wrap="square" lIns="0" tIns="0" rIns="0" bIns="0" rtlCol="0" anchor="ctr"/>
+          <a:lstStyle/>
+          <a:p>
+            <a:pPr marL="0" indent="0">
+              <a:buNone/>
+            </a:pPr>
+            <a:r>
+              <a:rPr lang="en-US" sz="1200" dirty="0">
+                <a:solidFill>
+                  <a:srgbClr val="1F2937"/>
+                </a:solidFill>
+                <a:latin typeface="Calibri" pitchFamily="34" charset="0"/>
+                <a:ea typeface="Calibri" pitchFamily="34" charset="-122"/>
+                <a:cs typeface="Calibri" pitchFamily="34" charset="-120"/>
+              </a:rPr>
+              <a:t>Mesurer le temps, la RAM MATLAB et la RAM interface pendant le calcul (début → fin)</a:t>
+            </a:r>
+            <a:endParaRPr lang="en-US" sz="1200" dirty="0"/>
+          </a:p>
+        </p:txBody>
+      </p:sp>
+      <p:sp>
+        <p:nvSpPr>
+          <p:cNvPr id="13" name="Shape 7"/>
+          <p:cNvSpPr/>
+          <p:nvPr/>
+        </p:nvSpPr>
+        <p:spPr>
+          <a:xfrm>
+            <a:off x="274320" y="1856232"/>
+            <a:ext cx="8595360" cy="530352"/>
+          </a:xfrm>
+          <a:prstGeom prst="rect">
+            <a:avLst/>
+          </a:prstGeom>
+          <a:solidFill>
+            <a:srgbClr val="FFFFFF"/>
+          </a:solidFill>
+          <a:ln w="12700">
+            <a:solidFill>
+              <a:srgbClr val="E5E7EB"/>
+            </a:solidFill>
+            <a:prstDash val="solid"/>
+          </a:ln>
+          <a:effectLst>
+            <a:outerShdw blurRad="101600" dist="38100" dir="8100000" algn="bl" rotWithShape="0">
+              <a:srgbClr val="000000">
+                <a:alpha val="15000"/>
+              </a:srgbClr>
+            </a:outerShdw>
+          </a:effectLst>
+        </p:spPr>
+      </p:sp>
+      <p:sp>
+        <p:nvSpPr>
+          <p:cNvPr id="14" name="Shape 8"/>
+          <p:cNvSpPr/>
+          <p:nvPr/>
+        </p:nvSpPr>
+        <p:spPr>
+          <a:xfrm>
+            <a:off x="274320" y="1856232"/>
+            <a:ext cx="548640" cy="530352"/>
+          </a:xfrm>
+          <a:prstGeom prst="rect">
+            <a:avLst/>
+          </a:prstGeom>
+          <a:solidFill>
+            <a:srgbClr val="1A5276"/>
+          </a:solidFill>
+          <a:ln w="12700">
+            <a:solidFill>
+              <a:srgbClr val="1A5276"/>
+            </a:solidFill>
+            <a:prstDash val="solid"/>
+          </a:ln>
+        </p:spPr>
+      </p:sp>
+      <p:sp>
+        <p:nvSpPr>
+          <p:cNvPr id="15" name="Text 9"/>
+          <p:cNvSpPr/>
+          <p:nvPr/>
+        </p:nvSpPr>
+        <p:spPr>
+          <a:xfrm>
+            <a:off x="274320" y="1856232"/>
+            <a:ext cx="548640" cy="530352"/>
+          </a:xfrm>
+          <a:prstGeom prst="rect">
+            <a:avLst/>
+          </a:prstGeom>
+          <a:noFill/>
+          <a:ln/>
+        </p:spPr>
+        <p:txBody>
+          <a:bodyPr wrap="square" lIns="0" tIns="0" rIns="0" bIns="0" rtlCol="0" anchor="ctr"/>
+          <a:lstStyle/>
+          <a:p>
+            <a:pPr marL="0" indent="0" algn="ctr">
+              <a:buNone/>
+            </a:pPr>
+            <a:r>
+              <a:rPr lang="en-US" sz="1300" b="1" dirty="0">
+                <a:solidFill>
+                  <a:srgbClr val="FFFFFF"/>
+                </a:solidFill>
+              </a:rPr>
+              <a:t>02</a:t>
+            </a:r>
+            <a:endParaRPr lang="en-US" sz="1300" dirty="0"/>
+          </a:p>
+        </p:txBody>
+      </p:sp>
+      <p:sp>
+        <p:nvSpPr>
+          <p:cNvPr id="16" name="Text 10"/>
+          <p:cNvSpPr/>
+          <p:nvPr/>
+        </p:nvSpPr>
+        <p:spPr>
+          <a:xfrm>
+            <a:off x="960120" y="1901952"/>
+            <a:ext cx="7772400" cy="438912"/>
+          </a:xfrm>
+          <a:prstGeom prst="rect">
+            <a:avLst/>
+          </a:prstGeom>
+          <a:noFill/>
+          <a:ln/>
+        </p:spPr>
+        <p:txBody>
+          <a:bodyPr wrap="square" lIns="0" tIns="0" rIns="0" bIns="0" rtlCol="0" anchor="ctr"/>
+          <a:lstStyle/>
+          <a:p>
+            <a:pPr marL="0" indent="0">
+              <a:buNone/>
+            </a:pPr>
+            <a:r>
+              <a:rPr lang="en-US" sz="1200" dirty="0">
+                <a:solidFill>
+                  <a:srgbClr val="1F2937"/>
+                </a:solidFill>
+                <a:latin typeface="Calibri" pitchFamily="34" charset="0"/>
+                <a:ea typeface="Calibri" pitchFamily="34" charset="-122"/>
+                <a:cs typeface="Calibri" pitchFamily="34" charset="-120"/>
+              </a:rPr>
+              <a:t>Corriger le code pour obtenir un intervalle de mesure précis de 0.5s (pause adaptatif)</a:t>
+            </a:r>
+            <a:endParaRPr lang="en-US" sz="1200" dirty="0"/>
+          </a:p>
+        </p:txBody>
+      </p:sp>
+      <p:sp>
+        <p:nvSpPr>
+          <p:cNvPr id="17" name="Shape 11"/>
+          <p:cNvSpPr/>
+          <p:nvPr/>
+        </p:nvSpPr>
+        <p:spPr>
+          <a:xfrm>
+            <a:off x="274320" y="2478024"/>
+            <a:ext cx="8595360" cy="530352"/>
+          </a:xfrm>
+          <a:prstGeom prst="rect">
+            <a:avLst/>
+          </a:prstGeom>
+          <a:solidFill>
+            <a:srgbClr val="FFFFFF"/>
+          </a:solidFill>
+          <a:ln w="12700">
+            <a:solidFill>
+              <a:srgbClr val="E5E7EB"/>
+            </a:solidFill>
+            <a:prstDash val="solid"/>
+          </a:ln>
+          <a:effectLst>
+            <a:outerShdw blurRad="101600" dist="38100" dir="8100000" algn="bl" rotWithShape="0">
+              <a:srgbClr val="000000">
+                <a:alpha val="15000"/>
+              </a:srgbClr>
+            </a:outerShdw>
+          </a:effectLst>
+        </p:spPr>
+      </p:sp>
+      <p:sp>
+        <p:nvSpPr>
+          <p:cNvPr id="18" name="Shape 12"/>
+          <p:cNvSpPr/>
+          <p:nvPr/>
+        </p:nvSpPr>
+        <p:spPr>
+          <a:xfrm>
+            <a:off x="274320" y="2478024"/>
+            <a:ext cx="548640" cy="530352"/>
+          </a:xfrm>
+          <a:prstGeom prst="rect">
+            <a:avLst/>
+          </a:prstGeom>
+          <a:solidFill>
+            <a:srgbClr val="0E7490"/>
+          </a:solidFill>
+          <a:ln w="12700">
+            <a:solidFill>
+              <a:srgbClr val="0E7490"/>
+            </a:solidFill>
+            <a:prstDash val="solid"/>
+          </a:ln>
+        </p:spPr>
+      </p:sp>
+      <p:sp>
+        <p:nvSpPr>
+          <p:cNvPr id="19" name="Text 13"/>
+          <p:cNvSpPr/>
+          <p:nvPr/>
+        </p:nvSpPr>
+        <p:spPr>
+          <a:xfrm>
+            <a:off x="274320" y="2478024"/>
+            <a:ext cx="548640" cy="530352"/>
+          </a:xfrm>
+          <a:prstGeom prst="rect">
+            <a:avLst/>
+          </a:prstGeom>
+          <a:noFill/>
+          <a:ln/>
+        </p:spPr>
+        <p:txBody>
+          <a:bodyPr wrap="square" lIns="0" tIns="0" rIns="0" bIns="0" rtlCol="0" anchor="ctr"/>
+          <a:lstStyle/>
+          <a:p>
+            <a:pPr marL="0" indent="0" algn="ctr">
+              <a:buNone/>
+            </a:pPr>
+            <a:r>
+              <a:rPr lang="en-US" sz="1300" b="1" dirty="0">
+                <a:solidFill>
+                  <a:srgbClr val="FFFFFF"/>
+                </a:solidFill>
+              </a:rPr>
+              <a:t>03</a:t>
+            </a:r>
+            <a:endParaRPr lang="en-US" sz="1300" dirty="0"/>
+          </a:p>
+        </p:txBody>
+      </p:sp>
+      <p:sp>
+        <p:nvSpPr>
+          <p:cNvPr id="20" name="Text 14"/>
+          <p:cNvSpPr/>
+          <p:nvPr/>
+        </p:nvSpPr>
+        <p:spPr>
+          <a:xfrm>
+            <a:off x="960120" y="2523744"/>
+            <a:ext cx="7772400" cy="438912"/>
+          </a:xfrm>
+          <a:prstGeom prst="rect">
+            <a:avLst/>
+          </a:prstGeom>
+          <a:noFill/>
+          <a:ln/>
+        </p:spPr>
+        <p:txBody>
+          <a:bodyPr wrap="square" lIns="0" tIns="0" rIns="0" bIns="0" rtlCol="0" anchor="ctr"/>
+          <a:lstStyle/>
+          <a:p>
+            <a:pPr marL="0" indent="0">
+              <a:buNone/>
+            </a:pPr>
+            <a:r>
+              <a:rPr lang="en-US" sz="1200" dirty="0">
+                <a:solidFill>
+                  <a:srgbClr val="1F2937"/>
+                </a:solidFill>
+                <a:latin typeface="Calibri" pitchFamily="34" charset="0"/>
+                <a:ea typeface="Calibri" pitchFamily="34" charset="-122"/>
+                <a:cs typeface="Calibri" pitchFamily="34" charset="-120"/>
+              </a:rPr>
+              <a:t>Calculer les statistiques : Max, Min, Mean et Std pour RAM MATLAB et RAM Interface</a:t>
+            </a:r>
+            <a:endParaRPr lang="en-US" sz="1200" dirty="0"/>
+          </a:p>
+        </p:txBody>
+      </p:sp>
+      <p:sp>
+        <p:nvSpPr>
+          <p:cNvPr id="21" name="Shape 15"/>
+          <p:cNvSpPr/>
+          <p:nvPr/>
+        </p:nvSpPr>
+        <p:spPr>
+          <a:xfrm>
+            <a:off x="274320" y="3099816"/>
+            <a:ext cx="8595360" cy="530352"/>
+          </a:xfrm>
+          <a:prstGeom prst="rect">
+            <a:avLst/>
+          </a:prstGeom>
+          <a:solidFill>
+            <a:srgbClr val="FFFFFF"/>
+          </a:solidFill>
+          <a:ln w="12700">
+            <a:solidFill>
+              <a:srgbClr val="E5E7EB"/>
+            </a:solidFill>
+            <a:prstDash val="solid"/>
+          </a:ln>
+          <a:effectLst>
+            <a:outerShdw blurRad="101600" dist="38100" dir="8100000" algn="bl" rotWithShape="0">
+              <a:srgbClr val="000000">
+                <a:alpha val="15000"/>
+              </a:srgbClr>
+            </a:outerShdw>
+          </a:effectLst>
+        </p:spPr>
+      </p:sp>
+      <p:sp>
+        <p:nvSpPr>
+          <p:cNvPr id="22" name="Shape 16"/>
+          <p:cNvSpPr/>
+          <p:nvPr/>
+        </p:nvSpPr>
+        <p:spPr>
+          <a:xfrm>
+            <a:off x="274320" y="3099816"/>
+            <a:ext cx="548640" cy="530352"/>
+          </a:xfrm>
+          <a:prstGeom prst="rect">
+            <a:avLst/>
+          </a:prstGeom>
+          <a:solidFill>
+            <a:srgbClr val="1A5276"/>
+          </a:solidFill>
+          <a:ln w="12700">
+            <a:solidFill>
+              <a:srgbClr val="1A5276"/>
+            </a:solidFill>
+            <a:prstDash val="solid"/>
+          </a:ln>
+        </p:spPr>
+      </p:sp>
+      <p:sp>
+        <p:nvSpPr>
+          <p:cNvPr id="23" name="Text 17"/>
+          <p:cNvSpPr/>
+          <p:nvPr/>
+        </p:nvSpPr>
+        <p:spPr>
+          <a:xfrm>
+            <a:off x="274320" y="3099816"/>
+            <a:ext cx="548640" cy="530352"/>
+          </a:xfrm>
+          <a:prstGeom prst="rect">
+            <a:avLst/>
+          </a:prstGeom>
+          <a:noFill/>
+          <a:ln/>
+        </p:spPr>
+        <p:txBody>
+          <a:bodyPr wrap="square" lIns="0" tIns="0" rIns="0" bIns="0" rtlCol="0" anchor="ctr"/>
+          <a:lstStyle/>
+          <a:p>
+            <a:pPr marL="0" indent="0" algn="ctr">
+              <a:buNone/>
+            </a:pPr>
+            <a:r>
+              <a:rPr lang="en-US" sz="1300" b="1" dirty="0">
+                <a:solidFill>
+                  <a:srgbClr val="FFFFFF"/>
+                </a:solidFill>
+              </a:rPr>
+              <a:t>04</a:t>
+            </a:r>
+            <a:endParaRPr lang="en-US" sz="1300" dirty="0"/>
+          </a:p>
+        </p:txBody>
+      </p:sp>
+      <p:sp>
+        <p:nvSpPr>
+          <p:cNvPr id="24" name="Text 18"/>
+          <p:cNvSpPr/>
+          <p:nvPr/>
+        </p:nvSpPr>
+        <p:spPr>
+          <a:xfrm>
+            <a:off x="960120" y="3145536"/>
+            <a:ext cx="7772400" cy="438912"/>
+          </a:xfrm>
+          <a:prstGeom prst="rect">
+            <a:avLst/>
+          </a:prstGeom>
+          <a:noFill/>
+          <a:ln/>
+        </p:spPr>
+        <p:txBody>
+          <a:bodyPr wrap="square" lIns="0" tIns="0" rIns="0" bIns="0" rtlCol="0" anchor="ctr"/>
+          <a:lstStyle/>
+          <a:p>
+            <a:pPr marL="0" indent="0">
+              <a:buNone/>
+            </a:pPr>
+            <a:r>
+              <a:rPr lang="en-US" sz="1200" dirty="0">
+                <a:solidFill>
+                  <a:srgbClr val="1F2937"/>
+                </a:solidFill>
+                <a:latin typeface="Calibri" pitchFamily="34" charset="0"/>
+                <a:ea typeface="Calibri" pitchFamily="34" charset="-122"/>
+                <a:cs typeface="Calibri" pitchFamily="34" charset="-120"/>
+              </a:rPr>
+              <a:t>Faire la même chose pour GUI Layout Toolbox avec mesure de la RAM interface JVM</a:t>
+            </a:r>
+            <a:endParaRPr lang="en-US" sz="1200" dirty="0"/>
+          </a:p>
+        </p:txBody>
+      </p:sp>
+      <p:sp>
+        <p:nvSpPr>
+          <p:cNvPr id="25" name="Shape 19"/>
+          <p:cNvSpPr/>
+          <p:nvPr/>
+        </p:nvSpPr>
+        <p:spPr>
+          <a:xfrm>
+            <a:off x="274320" y="3721608"/>
+            <a:ext cx="8595360" cy="530352"/>
+          </a:xfrm>
+          <a:prstGeom prst="rect">
+            <a:avLst/>
+          </a:prstGeom>
+          <a:solidFill>
+            <a:srgbClr val="FFFFFF"/>
+          </a:solidFill>
+          <a:ln w="12700">
+            <a:solidFill>
+              <a:srgbClr val="E5E7EB"/>
+            </a:solidFill>
+            <a:prstDash val="solid"/>
+          </a:ln>
+          <a:effectLst>
+            <a:outerShdw blurRad="101600" dist="38100" dir="8100000" algn="bl" rotWithShape="0">
+              <a:srgbClr val="000000">
+                <a:alpha val="15000"/>
+              </a:srgbClr>
+            </a:outerShdw>
+          </a:effectLst>
+        </p:spPr>
+      </p:sp>
+      <p:sp>
+        <p:nvSpPr>
+          <p:cNvPr id="26" name="Shape 20"/>
+          <p:cNvSpPr/>
+          <p:nvPr/>
+        </p:nvSpPr>
+        <p:spPr>
+          <a:xfrm>
+            <a:off x="274320" y="3721608"/>
+            <a:ext cx="548640" cy="530352"/>
+          </a:xfrm>
+          <a:prstGeom prst="rect">
+            <a:avLst/>
+          </a:prstGeom>
+          <a:solidFill>
+            <a:srgbClr val="0E7490"/>
+          </a:solidFill>
+          <a:ln w="12700">
+            <a:solidFill>
+              <a:srgbClr val="0E7490"/>
+            </a:solidFill>
+            <a:prstDash val="solid"/>
+          </a:ln>
+        </p:spPr>
+      </p:sp>
+      <p:sp>
+        <p:nvSpPr>
+          <p:cNvPr id="27" name="Text 21"/>
+          <p:cNvSpPr/>
+          <p:nvPr/>
+        </p:nvSpPr>
+        <p:spPr>
+          <a:xfrm>
+            <a:off x="274320" y="3721608"/>
+            <a:ext cx="548640" cy="530352"/>
+          </a:xfrm>
+          <a:prstGeom prst="rect">
+            <a:avLst/>
+          </a:prstGeom>
+          <a:noFill/>
+          <a:ln/>
+        </p:spPr>
+        <p:txBody>
+          <a:bodyPr wrap="square" lIns="0" tIns="0" rIns="0" bIns="0" rtlCol="0" anchor="ctr"/>
+          <a:lstStyle/>
+          <a:p>
+            <a:pPr marL="0" indent="0" algn="ctr">
+              <a:buNone/>
+            </a:pPr>
+            <a:r>
+              <a:rPr lang="en-US" sz="1300" b="1" dirty="0">
+                <a:solidFill>
+                  <a:srgbClr val="FFFFFF"/>
+                </a:solidFill>
+              </a:rPr>
+              <a:t>05</a:t>
+            </a:r>
+            <a:endParaRPr lang="en-US" sz="1300" dirty="0"/>
+          </a:p>
+        </p:txBody>
+      </p:sp>
+      <p:sp>
+        <p:nvSpPr>
+          <p:cNvPr id="28" name="Text 22"/>
+          <p:cNvSpPr/>
+          <p:nvPr/>
+        </p:nvSpPr>
+        <p:spPr>
+          <a:xfrm>
+            <a:off x="960120" y="3767328"/>
+            <a:ext cx="7772400" cy="438912"/>
+          </a:xfrm>
+          <a:prstGeom prst="rect">
+            <a:avLst/>
+          </a:prstGeom>
+          <a:noFill/>
+          <a:ln/>
+        </p:spPr>
+        <p:txBody>
+          <a:bodyPr wrap="square" lIns="0" tIns="0" rIns="0" bIns="0" rtlCol="0" anchor="ctr"/>
+          <a:lstStyle/>
+          <a:p>
+            <a:pPr marL="0" indent="0">
+              <a:buNone/>
+            </a:pPr>
+            <a:r>
+              <a:rPr lang="en-US" sz="1200" dirty="0">
+                <a:solidFill>
+                  <a:srgbClr val="1F2937"/>
+                </a:solidFill>
+                <a:latin typeface="Calibri" pitchFamily="34" charset="0"/>
+                <a:ea typeface="Calibri" pitchFamily="34" charset="-122"/>
+                <a:cs typeface="Calibri" pitchFamily="34" charset="-120"/>
+              </a:rPr>
+              <a:t>Interface adaptative avec GridLayout (proportions au lieu de pixels fixes)</a:t>
+            </a:r>
+            <a:endParaRPr lang="en-US" sz="1200" dirty="0"/>
+          </a:p>
+        </p:txBody>
+      </p:sp>
+      <p:sp>
+        <p:nvSpPr>
+          <p:cNvPr id="29" name="Shape 23"/>
+          <p:cNvSpPr/>
+          <p:nvPr/>
+        </p:nvSpPr>
+        <p:spPr>
+          <a:xfrm>
+            <a:off x="274320" y="4343400"/>
+            <a:ext cx="8595360" cy="530352"/>
+          </a:xfrm>
+          <a:prstGeom prst="rect">
+            <a:avLst/>
+          </a:prstGeom>
+          <a:solidFill>
+            <a:srgbClr val="FFFFFF"/>
+          </a:solidFill>
+          <a:ln w="12700">
+            <a:solidFill>
+              <a:srgbClr val="E5E7EB"/>
+            </a:solidFill>
+            <a:prstDash val="solid"/>
+          </a:ln>
+          <a:effectLst>
+            <a:outerShdw blurRad="101600" dist="38100" dir="8100000" algn="bl" rotWithShape="0">
+              <a:srgbClr val="000000">
+                <a:alpha val="15000"/>
+              </a:srgbClr>
+            </a:outerShdw>
+          </a:effectLst>
+        </p:spPr>
+      </p:sp>
+      <p:sp>
+        <p:nvSpPr>
+          <p:cNvPr id="30" name="Shape 24"/>
+          <p:cNvSpPr/>
+          <p:nvPr/>
+        </p:nvSpPr>
+        <p:spPr>
+          <a:xfrm>
+            <a:off x="274320" y="4343400"/>
+            <a:ext cx="548640" cy="530352"/>
+          </a:xfrm>
+          <a:prstGeom prst="rect">
+            <a:avLst/>
+          </a:prstGeom>
+          <a:solidFill>
+            <a:srgbClr val="1A5276"/>
+          </a:solidFill>
+          <a:ln w="12700">
+            <a:solidFill>
+              <a:srgbClr val="1A5276"/>
+            </a:solidFill>
+            <a:prstDash val="solid"/>
+          </a:ln>
+        </p:spPr>
+      </p:sp>
+      <p:sp>
+        <p:nvSpPr>
+          <p:cNvPr id="31" name="Text 25"/>
+          <p:cNvSpPr/>
+          <p:nvPr/>
+        </p:nvSpPr>
+        <p:spPr>
+          <a:xfrm>
+            <a:off x="274320" y="4343400"/>
+            <a:ext cx="548640" cy="530352"/>
+          </a:xfrm>
+          <a:prstGeom prst="rect">
+            <a:avLst/>
+          </a:prstGeom>
+          <a:noFill/>
+          <a:ln/>
+        </p:spPr>
+        <p:txBody>
+          <a:bodyPr wrap="square" lIns="0" tIns="0" rIns="0" bIns="0" rtlCol="0" anchor="ctr"/>
+          <a:lstStyle/>
+          <a:p>
+            <a:pPr marL="0" indent="0" algn="ctr">
+              <a:buNone/>
+            </a:pPr>
+            <a:r>
+              <a:rPr lang="en-US" sz="1300" b="1" dirty="0">
+                <a:solidFill>
+                  <a:srgbClr val="FFFFFF"/>
+                </a:solidFill>
+              </a:rPr>
+              <a:t>06</a:t>
+            </a:r>
+            <a:endParaRPr lang="en-US" sz="1300" dirty="0"/>
+          </a:p>
+        </p:txBody>
+      </p:sp>
+      <p:sp>
+        <p:nvSpPr>
+          <p:cNvPr id="32" name="Text 26"/>
+          <p:cNvSpPr/>
+          <p:nvPr/>
+        </p:nvSpPr>
+        <p:spPr>
+          <a:xfrm>
+            <a:off x="960120" y="4389120"/>
+            <a:ext cx="7772400" cy="438912"/>
+          </a:xfrm>
+          <a:prstGeom prst="rect">
+            <a:avLst/>
+          </a:prstGeom>
+          <a:noFill/>
+          <a:ln/>
+        </p:spPr>
+        <p:txBody>
+          <a:bodyPr wrap="square" lIns="0" tIns="0" rIns="0" bIns="0" rtlCol="0" anchor="ctr"/>
+          <a:lstStyle/>
+          <a:p>
+            <a:pPr marL="0" indent="0">
+              <a:buNone/>
+            </a:pPr>
+            <a:r>
+              <a:rPr lang="en-US" sz="1200" dirty="0">
+                <a:solidFill>
+                  <a:srgbClr val="1F2937"/>
+                </a:solidFill>
+                <a:latin typeface="Calibri" pitchFamily="34" charset="0"/>
+                <a:ea typeface="Calibri" pitchFamily="34" charset="-122"/>
+                <a:cs typeface="Calibri" pitchFamily="34" charset="-120"/>
+              </a:rPr>
+              <a:t>Générer un graphique comparatif RAM : App Designer vs GUI Layout Toolbox</a:t>
+            </a:r>
+            <a:endParaRPr lang="en-US" sz="1200" dirty="0"/>
+          </a:p>
+        </p:txBody>
+      </p:sp>
     </p:spTree>
     <p:extLst>
       <p:ext uri="{BB962C8B-B14F-4D97-AF65-F5344CB8AC3E}">
@@ -9332,10 +11303,10 @@
   <p:cSld>
     <p:spTree>
       <p:nvGrpSpPr>
-        <p:cNvPr id="1" name="">
+        <p:cNvPr id="1" name="Shape 270">
           <a:extLst>
             <a:ext uri="{FF2B5EF4-FFF2-40B4-BE49-F238E27FC236}">
-              <a16:creationId xmlns:a16="http://schemas.microsoft.com/office/drawing/2014/main" id="{16A4803D-94C6-5835-3E6A-260EC075E5A9}"/>
+              <a16:creationId xmlns:a16="http://schemas.microsoft.com/office/drawing/2014/main" xmlns="" id="{857A21E4-36FB-45A4-B653-0885D491669B}"/>
             </a:ext>
           </a:extLst>
         </p:cNvPr>
@@ -9350,12 +11321,250 @@
           <a:chExt cx="0" cy="0"/>
         </a:xfrm>
       </p:grpSpPr>
+      <p:pic>
+        <p:nvPicPr>
+          <p:cNvPr id="271" name="Google Shape;271;p40">
+            <a:extLst>
+              <a:ext uri="{FF2B5EF4-FFF2-40B4-BE49-F238E27FC236}">
+                <a16:creationId xmlns:a16="http://schemas.microsoft.com/office/drawing/2014/main" xmlns="" id="{48129860-581C-B2D7-2E17-129CA8B245BA}"/>
+              </a:ext>
+            </a:extLst>
+          </p:cNvPr>
+          <p:cNvPicPr preferRelativeResize="0"/>
+          <p:nvPr/>
+        </p:nvPicPr>
+        <p:blipFill>
+          <a:blip r:embed="rId3">
+            <a:alphaModFix/>
+          </a:blip>
+          <a:stretch>
+            <a:fillRect/>
+          </a:stretch>
+        </p:blipFill>
+        <p:spPr>
+          <a:xfrm>
+            <a:off x="5377298" y="0"/>
+            <a:ext cx="3766704" cy="5143499"/>
+          </a:xfrm>
+          <a:prstGeom prst="rect">
+            <a:avLst/>
+          </a:prstGeom>
+          <a:noFill/>
+          <a:ln>
+            <a:noFill/>
+          </a:ln>
+        </p:spPr>
+      </p:pic>
+      <p:sp>
+        <p:nvSpPr>
+          <p:cNvPr id="273" name="Google Shape;273;p40">
+            <a:extLst>
+              <a:ext uri="{FF2B5EF4-FFF2-40B4-BE49-F238E27FC236}">
+                <a16:creationId xmlns:a16="http://schemas.microsoft.com/office/drawing/2014/main" xmlns="" id="{F7948FE7-1B59-CF82-E3A3-164F1DEBAF7C}"/>
+              </a:ext>
+            </a:extLst>
+          </p:cNvPr>
+          <p:cNvSpPr txBox="1"/>
+          <p:nvPr/>
+        </p:nvSpPr>
+        <p:spPr>
+          <a:xfrm>
+            <a:off x="867383" y="4561810"/>
+            <a:ext cx="4886100" cy="431100"/>
+          </a:xfrm>
+          <a:prstGeom prst="rect">
+            <a:avLst/>
+          </a:prstGeom>
+          <a:noFill/>
+          <a:ln>
+            <a:noFill/>
+          </a:ln>
+        </p:spPr>
+        <p:txBody>
+          <a:bodyPr spcFirstLastPara="1" wrap="square" lIns="91425" tIns="91425" rIns="91425" bIns="91425" anchor="t" anchorCtr="0">
+            <a:spAutoFit/>
+          </a:bodyPr>
+          <a:lstStyle/>
+          <a:p>
+            <a:pPr marL="0" lvl="0" indent="0" algn="l" rtl="0">
+              <a:lnSpc>
+                <a:spcPct val="115000"/>
+              </a:lnSpc>
+              <a:spcBef>
+                <a:spcPts val="0"/>
+              </a:spcBef>
+              <a:spcAft>
+                <a:spcPts val="0"/>
+              </a:spcAft>
+              <a:buNone/>
+            </a:pPr>
+            <a:r>
+              <a:rPr lang="fr" sz="1600" dirty="0">
+                <a:solidFill>
+                  <a:srgbClr val="F29403"/>
+                </a:solidFill>
+                <a:latin typeface="Montserrat"/>
+                <a:ea typeface="Montserrat"/>
+                <a:cs typeface="Montserrat"/>
+                <a:sym typeface="Montserrat"/>
+              </a:rPr>
+              <a:t>icam.fr/reseaux-sociaux</a:t>
+            </a:r>
+            <a:endParaRPr sz="1600" dirty="0">
+              <a:solidFill>
+                <a:srgbClr val="646363"/>
+              </a:solidFill>
+              <a:latin typeface="Montserrat"/>
+              <a:ea typeface="Montserrat"/>
+              <a:cs typeface="Montserrat"/>
+              <a:sym typeface="Montserrat"/>
+            </a:endParaRPr>
+          </a:p>
+        </p:txBody>
+      </p:sp>
+      <p:sp>
+        <p:nvSpPr>
+          <p:cNvPr id="2" name="Google Shape;272;p40">
+            <a:extLst>
+              <a:ext uri="{FF2B5EF4-FFF2-40B4-BE49-F238E27FC236}">
+                <a16:creationId xmlns:a16="http://schemas.microsoft.com/office/drawing/2014/main" xmlns="" id="{D78742D0-C620-9378-FBDD-AB3126D1351B}"/>
+              </a:ext>
+            </a:extLst>
+          </p:cNvPr>
+          <p:cNvSpPr txBox="1"/>
+          <p:nvPr/>
+        </p:nvSpPr>
+        <p:spPr>
+          <a:xfrm>
+            <a:off x="460146" y="1855163"/>
+            <a:ext cx="5769966" cy="943818"/>
+          </a:xfrm>
+          <a:prstGeom prst="rect">
+            <a:avLst/>
+          </a:prstGeom>
+          <a:noFill/>
+          <a:ln>
+            <a:noFill/>
+          </a:ln>
+        </p:spPr>
+        <p:txBody>
+          <a:bodyPr spcFirstLastPara="1" wrap="square" lIns="91425" tIns="91425" rIns="91425" bIns="91425" anchor="t" anchorCtr="0">
+            <a:spAutoFit/>
+          </a:bodyPr>
+          <a:lstStyle/>
+          <a:p>
+            <a:pPr lvl="0">
+              <a:lnSpc>
+                <a:spcPct val="115000"/>
+              </a:lnSpc>
+              <a:spcAft>
+                <a:spcPts val="400"/>
+              </a:spcAft>
+            </a:pPr>
+            <a:r>
+              <a:rPr lang="fr-FR" sz="4000" b="1" dirty="0">
+                <a:solidFill>
+                  <a:schemeClr val="tx1"/>
+                </a:solidFill>
+                <a:latin typeface="Montserrat"/>
+                <a:ea typeface="Montserrat"/>
+                <a:cs typeface="Montserrat"/>
+                <a:sym typeface="Montserrat"/>
+              </a:rPr>
+              <a:t>TRAVAUX REALISES</a:t>
+            </a:r>
+            <a:endParaRPr lang="fr-FR" sz="4000" b="1" dirty="0">
+              <a:solidFill>
+                <a:schemeClr val="tx1"/>
+              </a:solidFill>
+              <a:latin typeface="Montserrat"/>
+              <a:ea typeface="Montserrat"/>
+              <a:cs typeface="Montserrat"/>
+              <a:sym typeface="Montserrat"/>
+            </a:endParaRPr>
+          </a:p>
+        </p:txBody>
+      </p:sp>
+      <p:sp>
+        <p:nvSpPr>
+          <p:cNvPr id="8" name="ZoneTexte 7">
+            <a:extLst>
+              <a:ext uri="{FF2B5EF4-FFF2-40B4-BE49-F238E27FC236}">
+                <a16:creationId xmlns:a16="http://schemas.microsoft.com/office/drawing/2014/main" xmlns="" id="{F09FD26D-2DE7-631D-8069-47A7455C2F30}"/>
+              </a:ext>
+            </a:extLst>
+          </p:cNvPr>
+          <p:cNvSpPr txBox="1"/>
+          <p:nvPr/>
+        </p:nvSpPr>
+        <p:spPr>
+          <a:xfrm>
+            <a:off x="590424" y="4592800"/>
+            <a:ext cx="653143" cy="400110"/>
+          </a:xfrm>
+          <a:prstGeom prst="rect">
+            <a:avLst/>
+          </a:prstGeom>
+          <a:noFill/>
+        </p:spPr>
+        <p:txBody>
+          <a:bodyPr wrap="square">
+            <a:spAutoFit/>
+          </a:bodyPr>
+          <a:lstStyle/>
+          <a:p>
+            <a:r>
+              <a:rPr lang="fr-CM" sz="2000" b="1" dirty="0">
+                <a:latin typeface="Aharoni" panose="020F0502020204030204" pitchFamily="2" charset="-79"/>
+                <a:cs typeface="Aharoni" panose="020F0502020204030204" pitchFamily="2" charset="-79"/>
+              </a:rPr>
+              <a:t>4</a:t>
+            </a:r>
+          </a:p>
+        </p:txBody>
+      </p:sp>
+    </p:spTree>
+    <p:extLst>
+      <p:ext uri="{BB962C8B-B14F-4D97-AF65-F5344CB8AC3E}">
+        <p14:creationId xmlns:p14="http://schemas.microsoft.com/office/powerpoint/2010/main" val="1376808320"/>
+      </p:ext>
+    </p:extLst>
+  </p:cSld>
+  <p:clrMapOvr>
+    <a:masterClrMapping/>
+  </p:clrMapOvr>
+</p:sld>
+</file>
+
+<file path=ppt/slides/slide8.xml><?xml version="1.0" encoding="utf-8"?>
+<p:sld xmlns:a="http://schemas.openxmlformats.org/drawingml/2006/main" xmlns:r="http://schemas.openxmlformats.org/officeDocument/2006/relationships" xmlns:p="http://schemas.openxmlformats.org/presentationml/2006/main">
+  <p:cSld>
+    <p:spTree>
+      <p:nvGrpSpPr>
+        <p:cNvPr id="1" name="">
+          <a:extLst>
+            <a:ext uri="{FF2B5EF4-FFF2-40B4-BE49-F238E27FC236}">
+              <a16:creationId xmlns:a16="http://schemas.microsoft.com/office/drawing/2014/main" xmlns="" id="{16A4803D-94C6-5835-3E6A-260EC075E5A9}"/>
+            </a:ext>
+          </a:extLst>
+        </p:cNvPr>
+        <p:cNvGrpSpPr/>
+        <p:nvPr/>
+      </p:nvGrpSpPr>
+      <p:grpSpPr>
+        <a:xfrm>
+          <a:off x="0" y="0"/>
+          <a:ext cx="0" cy="0"/>
+          <a:chOff x="0" y="0"/>
+          <a:chExt cx="0" cy="0"/>
+        </a:xfrm>
+      </p:grpSpPr>
       <p:sp>
         <p:nvSpPr>
           <p:cNvPr id="2" name="Titre 1">
             <a:extLst>
               <a:ext uri="{FF2B5EF4-FFF2-40B4-BE49-F238E27FC236}">
-                <a16:creationId xmlns:a16="http://schemas.microsoft.com/office/drawing/2014/main" id="{7DF45A83-F143-28EC-85AE-26FF509590CB}"/>
+                <a16:creationId xmlns:a16="http://schemas.microsoft.com/office/drawing/2014/main" xmlns="" id="{7DF45A83-F143-28EC-85AE-26FF509590CB}"/>
               </a:ext>
             </a:extLst>
           </p:cNvPr>
@@ -9384,119 +11593,10 @@
       </p:sp>
       <p:sp>
         <p:nvSpPr>
-          <p:cNvPr id="3" name="Espace réservé du texte 2">
-            <a:extLst>
-              <a:ext uri="{FF2B5EF4-FFF2-40B4-BE49-F238E27FC236}">
-                <a16:creationId xmlns:a16="http://schemas.microsoft.com/office/drawing/2014/main" id="{05F60A4C-81AF-2EF5-6AA8-76668F7B0F2E}"/>
-              </a:ext>
-            </a:extLst>
-          </p:cNvPr>
-          <p:cNvSpPr>
-            <a:spLocks noGrp="1"/>
-          </p:cNvSpPr>
-          <p:nvPr>
-            <p:ph type="body" idx="1"/>
-          </p:nvPr>
-        </p:nvSpPr>
-        <p:spPr/>
-        <p:txBody>
-          <a:bodyPr>
-            <a:normAutofit/>
-          </a:bodyPr>
-          <a:lstStyle/>
-          <a:p>
-            <a:r>
-              <a:rPr lang="fr-FR" b="1" dirty="0">
-                <a:solidFill>
-                  <a:srgbClr val="636366"/>
-                </a:solidFill>
-                <a:latin typeface="Montserrat"/>
-                <a:ea typeface="Montserrat"/>
-                <a:cs typeface="Montserrat"/>
-                <a:sym typeface="Montserrat"/>
-              </a:rPr>
-              <a:t>Optimisation mémoire : </a:t>
-            </a:r>
-            <a:r>
-              <a:rPr lang="fr-FR" dirty="0">
-                <a:solidFill>
-                  <a:srgbClr val="636366"/>
-                </a:solidFill>
-                <a:latin typeface="Montserrat"/>
-                <a:ea typeface="Montserrat"/>
-                <a:cs typeface="Montserrat"/>
-                <a:sym typeface="Montserrat"/>
-              </a:rPr>
-              <a:t>hypothèses envisagées</a:t>
-            </a:r>
-          </a:p>
-          <a:p>
-            <a:pPr>
-              <a:buFontTx/>
-              <a:buChar char="-"/>
-            </a:pPr>
-            <a:r>
-              <a:rPr lang="fr-FR" dirty="0">
-                <a:solidFill>
-                  <a:srgbClr val="636366"/>
-                </a:solidFill>
-                <a:latin typeface="Montserrat"/>
-                <a:ea typeface="Montserrat"/>
-                <a:cs typeface="Montserrat"/>
-                <a:sym typeface="Montserrat"/>
-              </a:rPr>
-              <a:t>Fixer un nombre d’échantillons maximums</a:t>
-            </a:r>
-          </a:p>
-          <a:p>
-            <a:pPr marL="114300" indent="0">
-              <a:buNone/>
-            </a:pPr>
-            <a:r>
-              <a:rPr lang="fr-FR" dirty="0">
-                <a:solidFill>
-                  <a:srgbClr val="636366"/>
-                </a:solidFill>
-                <a:latin typeface="Montserrat"/>
-                <a:ea typeface="Montserrat"/>
-                <a:cs typeface="Montserrat"/>
-                <a:sym typeface="Montserrat"/>
-              </a:rPr>
-              <a:t>La question qui se pose est de savoir ce qui coute le plus , le calcul des échantillons ou leur affichage ? Après profilage du code , on se rend compte que le calcul coute énormément ~1,632s alors que l’affichage coute ~0,298.</a:t>
-            </a:r>
-          </a:p>
-          <a:p>
-            <a:pPr marL="114300" indent="0">
-              <a:buNone/>
-            </a:pPr>
-            <a:r>
-              <a:rPr lang="fr-FR" dirty="0">
-                <a:solidFill>
-                  <a:srgbClr val="636366"/>
-                </a:solidFill>
-                <a:latin typeface="Montserrat"/>
-                <a:ea typeface="Montserrat"/>
-                <a:cs typeface="Montserrat"/>
-                <a:sym typeface="Montserrat"/>
-              </a:rPr>
-              <a:t>Je pense donc plus pertinent de limiter le nombre d’échantillons surtout au niveau du calcul… mais il serait intéressant aussi d’ajouter une double restriction au niveau de l’affichage </a:t>
-            </a:r>
-          </a:p>
-          <a:p>
-            <a:pPr>
-              <a:buFontTx/>
-              <a:buChar char="-"/>
-            </a:pPr>
-            <a:endParaRPr lang="fr-CM" dirty="0"/>
-          </a:p>
-        </p:txBody>
-      </p:sp>
-      <p:sp>
-        <p:nvSpPr>
           <p:cNvPr id="4" name="ZoneTexte 3">
             <a:extLst>
               <a:ext uri="{FF2B5EF4-FFF2-40B4-BE49-F238E27FC236}">
-                <a16:creationId xmlns:a16="http://schemas.microsoft.com/office/drawing/2014/main" id="{81D05D8C-24FE-19DC-4AA0-1D1A15AFCEF9}"/>
+                <a16:creationId xmlns:a16="http://schemas.microsoft.com/office/drawing/2014/main" xmlns="" id="{81D05D8C-24FE-19DC-4AA0-1D1A15AFCEF9}"/>
               </a:ext>
             </a:extLst>
           </p:cNvPr>
@@ -9548,7 +11648,7 @@
 </p:sld>
 </file>
 
-<file path=ppt/slides/slide8.xml><?xml version="1.0" encoding="utf-8"?>
+<file path=ppt/slides/slide9.xml><?xml version="1.0" encoding="utf-8"?>
 <p:sld xmlns:a="http://schemas.openxmlformats.org/drawingml/2006/main" xmlns:r="http://schemas.openxmlformats.org/officeDocument/2006/relationships" xmlns:p="http://schemas.openxmlformats.org/presentationml/2006/main">
   <p:cSld>
     <p:spTree>
@@ -9556,7 +11656,7 @@
         <p:cNvPr id="1" name="">
           <a:extLst>
             <a:ext uri="{FF2B5EF4-FFF2-40B4-BE49-F238E27FC236}">
-              <a16:creationId xmlns:a16="http://schemas.microsoft.com/office/drawing/2014/main" id="{2B919FF9-C07C-1ABB-8A8E-1F36DCD429AC}"/>
+              <a16:creationId xmlns:a16="http://schemas.microsoft.com/office/drawing/2014/main" xmlns="" id="{2B919FF9-C07C-1ABB-8A8E-1F36DCD429AC}"/>
             </a:ext>
           </a:extLst>
         </p:cNvPr>
@@ -9576,7 +11676,7 @@
           <p:cNvPr id="2" name="Titre 1">
             <a:extLst>
               <a:ext uri="{FF2B5EF4-FFF2-40B4-BE49-F238E27FC236}">
-                <a16:creationId xmlns:a16="http://schemas.microsoft.com/office/drawing/2014/main" id="{01E29A79-6D5C-894D-187B-01A78B5D0B32}"/>
+                <a16:creationId xmlns:a16="http://schemas.microsoft.com/office/drawing/2014/main" xmlns="" id="{01E29A79-6D5C-894D-187B-01A78B5D0B32}"/>
               </a:ext>
             </a:extLst>
           </p:cNvPr>
@@ -9608,7 +11708,7 @@
           <p:cNvPr id="3" name="Espace réservé du texte 2">
             <a:extLst>
               <a:ext uri="{FF2B5EF4-FFF2-40B4-BE49-F238E27FC236}">
-                <a16:creationId xmlns:a16="http://schemas.microsoft.com/office/drawing/2014/main" id="{1FBF0F0F-5799-E599-2FD2-6A47B45698C6}"/>
+                <a16:creationId xmlns:a16="http://schemas.microsoft.com/office/drawing/2014/main" xmlns="" id="{1FBF0F0F-5799-E599-2FD2-6A47B45698C6}"/>
               </a:ext>
             </a:extLst>
           </p:cNvPr>
@@ -9712,7 +11812,7 @@
           <p:cNvPr id="4" name="ZoneTexte 3">
             <a:extLst>
               <a:ext uri="{FF2B5EF4-FFF2-40B4-BE49-F238E27FC236}">
-                <a16:creationId xmlns:a16="http://schemas.microsoft.com/office/drawing/2014/main" id="{98B64346-D02D-CB73-0D71-0588C616C543}"/>
+                <a16:creationId xmlns:a16="http://schemas.microsoft.com/office/drawing/2014/main" xmlns="" id="{98B64346-D02D-CB73-0D71-0588C616C543}"/>
               </a:ext>
             </a:extLst>
           </p:cNvPr>
@@ -9755,435 +11855,6 @@
     <p:extLst>
       <p:ext uri="{BB962C8B-B14F-4D97-AF65-F5344CB8AC3E}">
         <p14:creationId xmlns:p14="http://schemas.microsoft.com/office/powerpoint/2010/main" val="2518231310"/>
-      </p:ext>
-    </p:extLst>
-  </p:cSld>
-  <p:clrMapOvr>
-    <a:masterClrMapping/>
-  </p:clrMapOvr>
-</p:sld>
-</file>
-
-<file path=ppt/slides/slide9.xml><?xml version="1.0" encoding="utf-8"?>
-<p:sld xmlns:a="http://schemas.openxmlformats.org/drawingml/2006/main" xmlns:r="http://schemas.openxmlformats.org/officeDocument/2006/relationships" xmlns:p="http://schemas.openxmlformats.org/presentationml/2006/main">
-  <p:cSld>
-    <p:spTree>
-      <p:nvGrpSpPr>
-        <p:cNvPr id="1" name="Shape 226">
-          <a:extLst>
-            <a:ext uri="{FF2B5EF4-FFF2-40B4-BE49-F238E27FC236}">
-              <a16:creationId xmlns:a16="http://schemas.microsoft.com/office/drawing/2014/main" id="{7386E986-1ADE-CB08-82E5-9334B2A9E103}"/>
-            </a:ext>
-          </a:extLst>
-        </p:cNvPr>
-        <p:cNvGrpSpPr/>
-        <p:nvPr/>
-      </p:nvGrpSpPr>
-      <p:grpSpPr>
-        <a:xfrm>
-          <a:off x="0" y="0"/>
-          <a:ext cx="0" cy="0"/>
-          <a:chOff x="0" y="0"/>
-          <a:chExt cx="0" cy="0"/>
-        </a:xfrm>
-      </p:grpSpPr>
-      <p:sp>
-        <p:nvSpPr>
-          <p:cNvPr id="227" name="Google Shape;227;p38">
-            <a:extLst>
-              <a:ext uri="{FF2B5EF4-FFF2-40B4-BE49-F238E27FC236}">
-                <a16:creationId xmlns:a16="http://schemas.microsoft.com/office/drawing/2014/main" id="{29385FAF-BA05-27AC-1E08-0CB2247C2B6B}"/>
-              </a:ext>
-            </a:extLst>
-          </p:cNvPr>
-          <p:cNvSpPr/>
-          <p:nvPr/>
-        </p:nvSpPr>
-        <p:spPr>
-          <a:xfrm>
-            <a:off x="1350" y="2145300"/>
-            <a:ext cx="9141300" cy="2466900"/>
-          </a:xfrm>
-          <a:prstGeom prst="rect">
-            <a:avLst/>
-          </a:prstGeom>
-          <a:solidFill>
-            <a:schemeClr val="lt2"/>
-          </a:solidFill>
-          <a:ln>
-            <a:noFill/>
-          </a:ln>
-        </p:spPr>
-        <p:txBody>
-          <a:bodyPr spcFirstLastPara="1" wrap="square" lIns="91425" tIns="91425" rIns="91425" bIns="91425" anchor="ctr" anchorCtr="0">
-            <a:noAutofit/>
-          </a:bodyPr>
-          <a:lstStyle/>
-          <a:p>
-            <a:pPr marL="0" lvl="0" indent="0" algn="l" rtl="0">
-              <a:spcBef>
-                <a:spcPts val="0"/>
-              </a:spcBef>
-              <a:spcAft>
-                <a:spcPts val="0"/>
-              </a:spcAft>
-              <a:buNone/>
-            </a:pPr>
-            <a:endParaRPr/>
-          </a:p>
-        </p:txBody>
-      </p:sp>
-      <p:pic>
-        <p:nvPicPr>
-          <p:cNvPr id="228" name="Google Shape;228;p38">
-            <a:extLst>
-              <a:ext uri="{FF2B5EF4-FFF2-40B4-BE49-F238E27FC236}">
-                <a16:creationId xmlns:a16="http://schemas.microsoft.com/office/drawing/2014/main" id="{F0F2850D-416C-9038-8B91-3BD6239A6DDD}"/>
-              </a:ext>
-            </a:extLst>
-          </p:cNvPr>
-          <p:cNvPicPr preferRelativeResize="0"/>
-          <p:nvPr/>
-        </p:nvPicPr>
-        <p:blipFill>
-          <a:blip r:embed="rId3">
-            <a:alphaModFix/>
-          </a:blip>
-          <a:stretch>
-            <a:fillRect/>
-          </a:stretch>
-        </p:blipFill>
-        <p:spPr>
-          <a:xfrm>
-            <a:off x="3484075" y="2150"/>
-            <a:ext cx="5659925" cy="2114550"/>
-          </a:xfrm>
-          <a:prstGeom prst="rect">
-            <a:avLst/>
-          </a:prstGeom>
-          <a:noFill/>
-          <a:ln>
-            <a:noFill/>
-          </a:ln>
-        </p:spPr>
-      </p:pic>
-      <p:sp>
-        <p:nvSpPr>
-          <p:cNvPr id="229" name="Google Shape;229;p38">
-            <a:extLst>
-              <a:ext uri="{FF2B5EF4-FFF2-40B4-BE49-F238E27FC236}">
-                <a16:creationId xmlns:a16="http://schemas.microsoft.com/office/drawing/2014/main" id="{32925A70-4A56-9FC5-7F84-BD587D9FF427}"/>
-              </a:ext>
-            </a:extLst>
-          </p:cNvPr>
-          <p:cNvSpPr/>
-          <p:nvPr/>
-        </p:nvSpPr>
-        <p:spPr>
-          <a:xfrm>
-            <a:off x="1350" y="0"/>
-            <a:ext cx="3482700" cy="2114400"/>
-          </a:xfrm>
-          <a:prstGeom prst="rect">
-            <a:avLst/>
-          </a:prstGeom>
-          <a:solidFill>
-            <a:srgbClr val="09B0B3"/>
-          </a:solidFill>
-          <a:ln>
-            <a:noFill/>
-          </a:ln>
-        </p:spPr>
-        <p:txBody>
-          <a:bodyPr spcFirstLastPara="1" wrap="square" lIns="91425" tIns="91425" rIns="91425" bIns="91425" anchor="ctr" anchorCtr="0">
-            <a:noAutofit/>
-          </a:bodyPr>
-          <a:lstStyle/>
-          <a:p>
-            <a:pPr marL="0" lvl="0" indent="0" algn="l" rtl="0">
-              <a:spcBef>
-                <a:spcPts val="0"/>
-              </a:spcBef>
-              <a:spcAft>
-                <a:spcPts val="0"/>
-              </a:spcAft>
-              <a:buNone/>
-            </a:pPr>
-            <a:endParaRPr/>
-          </a:p>
-        </p:txBody>
-      </p:sp>
-      <p:sp>
-        <p:nvSpPr>
-          <p:cNvPr id="230" name="Google Shape;230;p38">
-            <a:extLst>
-              <a:ext uri="{FF2B5EF4-FFF2-40B4-BE49-F238E27FC236}">
-                <a16:creationId xmlns:a16="http://schemas.microsoft.com/office/drawing/2014/main" id="{3D9D39D2-FF67-7009-03A2-B675022B58A2}"/>
-              </a:ext>
-            </a:extLst>
-          </p:cNvPr>
-          <p:cNvSpPr txBox="1"/>
-          <p:nvPr/>
-        </p:nvSpPr>
-        <p:spPr>
-          <a:xfrm>
-            <a:off x="1040500" y="4715250"/>
-            <a:ext cx="4886100" cy="323100"/>
-          </a:xfrm>
-          <a:prstGeom prst="rect">
-            <a:avLst/>
-          </a:prstGeom>
-          <a:noFill/>
-          <a:ln>
-            <a:noFill/>
-          </a:ln>
-        </p:spPr>
-        <p:txBody>
-          <a:bodyPr spcFirstLastPara="1" wrap="square" lIns="91425" tIns="91425" rIns="91425" bIns="91425" anchor="t" anchorCtr="0">
-            <a:spAutoFit/>
-          </a:bodyPr>
-          <a:lstStyle/>
-          <a:p>
-            <a:pPr marL="0" lvl="0" indent="0" algn="l" rtl="0">
-              <a:lnSpc>
-                <a:spcPct val="115000"/>
-              </a:lnSpc>
-              <a:spcBef>
-                <a:spcPts val="0"/>
-              </a:spcBef>
-              <a:spcAft>
-                <a:spcPts val="0"/>
-              </a:spcAft>
-              <a:buNone/>
-            </a:pPr>
-            <a:endParaRPr sz="900">
-              <a:solidFill>
-                <a:srgbClr val="646363"/>
-              </a:solidFill>
-              <a:latin typeface="Montserrat"/>
-              <a:ea typeface="Montserrat"/>
-              <a:cs typeface="Montserrat"/>
-              <a:sym typeface="Montserrat"/>
-            </a:endParaRPr>
-          </a:p>
-        </p:txBody>
-      </p:sp>
-      <p:pic>
-        <p:nvPicPr>
-          <p:cNvPr id="232" name="Google Shape;232;p38">
-            <a:extLst>
-              <a:ext uri="{FF2B5EF4-FFF2-40B4-BE49-F238E27FC236}">
-                <a16:creationId xmlns:a16="http://schemas.microsoft.com/office/drawing/2014/main" id="{6835C172-CF37-24B8-9C3B-314FE892F071}"/>
-              </a:ext>
-            </a:extLst>
-          </p:cNvPr>
-          <p:cNvPicPr preferRelativeResize="0"/>
-          <p:nvPr/>
-        </p:nvPicPr>
-        <p:blipFill>
-          <a:blip r:embed="rId4">
-            <a:alphaModFix/>
-          </a:blip>
-          <a:stretch>
-            <a:fillRect/>
-          </a:stretch>
-        </p:blipFill>
-        <p:spPr>
-          <a:xfrm>
-            <a:off x="8035050" y="4614500"/>
-            <a:ext cx="696375" cy="447700"/>
-          </a:xfrm>
-          <a:prstGeom prst="rect">
-            <a:avLst/>
-          </a:prstGeom>
-          <a:noFill/>
-          <a:ln>
-            <a:noFill/>
-          </a:ln>
-        </p:spPr>
-      </p:pic>
-      <p:sp>
-        <p:nvSpPr>
-          <p:cNvPr id="234" name="Google Shape;234;p38">
-            <a:extLst>
-              <a:ext uri="{FF2B5EF4-FFF2-40B4-BE49-F238E27FC236}">
-                <a16:creationId xmlns:a16="http://schemas.microsoft.com/office/drawing/2014/main" id="{F16F5A86-D019-C53A-FC37-3A7EA3BC0521}"/>
-              </a:ext>
-            </a:extLst>
-          </p:cNvPr>
-          <p:cNvSpPr txBox="1"/>
-          <p:nvPr/>
-        </p:nvSpPr>
-        <p:spPr>
-          <a:xfrm>
-            <a:off x="824528" y="858560"/>
-            <a:ext cx="3119007" cy="666819"/>
-          </a:xfrm>
-          <a:prstGeom prst="rect">
-            <a:avLst/>
-          </a:prstGeom>
-          <a:noFill/>
-          <a:ln>
-            <a:noFill/>
-          </a:ln>
-        </p:spPr>
-        <p:txBody>
-          <a:bodyPr spcFirstLastPara="1" wrap="square" lIns="91425" tIns="91425" rIns="91425" bIns="91425" anchor="t" anchorCtr="0">
-            <a:spAutoFit/>
-          </a:bodyPr>
-          <a:lstStyle/>
-          <a:p>
-            <a:pPr marL="0" lvl="0" indent="0" algn="l" rtl="0">
-              <a:lnSpc>
-                <a:spcPct val="100000"/>
-              </a:lnSpc>
-              <a:spcBef>
-                <a:spcPts val="0"/>
-              </a:spcBef>
-              <a:spcAft>
-                <a:spcPts val="400"/>
-              </a:spcAft>
-              <a:buNone/>
-            </a:pPr>
-            <a:r>
-              <a:rPr lang="fr" sz="2800" b="1" dirty="0">
-                <a:solidFill>
-                  <a:schemeClr val="lt1"/>
-                </a:solidFill>
-                <a:latin typeface="Montserrat"/>
-                <a:ea typeface="Montserrat"/>
-                <a:cs typeface="Montserrat"/>
-                <a:sym typeface="Montserrat"/>
-              </a:rPr>
-              <a:t>A VENIR </a:t>
-            </a:r>
-            <a:endParaRPr sz="2800" b="1" dirty="0">
-              <a:solidFill>
-                <a:schemeClr val="lt1"/>
-              </a:solidFill>
-              <a:latin typeface="Montserrat"/>
-              <a:ea typeface="Montserrat"/>
-              <a:cs typeface="Montserrat"/>
-              <a:sym typeface="Montserrat"/>
-            </a:endParaRPr>
-          </a:p>
-        </p:txBody>
-      </p:sp>
-      <p:sp>
-        <p:nvSpPr>
-          <p:cNvPr id="2" name="ZoneTexte 1">
-            <a:extLst>
-              <a:ext uri="{FF2B5EF4-FFF2-40B4-BE49-F238E27FC236}">
-                <a16:creationId xmlns:a16="http://schemas.microsoft.com/office/drawing/2014/main" id="{C43E3EB4-E970-6683-4E57-CE91E6270272}"/>
-              </a:ext>
-            </a:extLst>
-          </p:cNvPr>
-          <p:cNvSpPr txBox="1"/>
-          <p:nvPr/>
-        </p:nvSpPr>
-        <p:spPr>
-          <a:xfrm>
-            <a:off x="612322" y="4597622"/>
-            <a:ext cx="261257" cy="707886"/>
-          </a:xfrm>
-          <a:prstGeom prst="rect">
-            <a:avLst/>
-          </a:prstGeom>
-          <a:noFill/>
-        </p:spPr>
-        <p:txBody>
-          <a:bodyPr wrap="square">
-            <a:spAutoFit/>
-          </a:bodyPr>
-          <a:lstStyle/>
-          <a:p>
-            <a:r>
-              <a:rPr lang="fr-CM" sz="2000" b="1" dirty="0">
-                <a:latin typeface="Aharoni" panose="020F0502020204030204" pitchFamily="2" charset="-79"/>
-                <a:cs typeface="Aharoni" panose="020F0502020204030204" pitchFamily="2" charset="-79"/>
-              </a:rPr>
-              <a:t>8</a:t>
-            </a:r>
-          </a:p>
-          <a:p>
-            <a:endParaRPr lang="fr-CM" sz="2000" b="1" dirty="0">
-              <a:latin typeface="Aharoni" panose="020F0502020204030204" pitchFamily="2" charset="-79"/>
-              <a:cs typeface="Aharoni" panose="020F0502020204030204" pitchFamily="2" charset="-79"/>
-            </a:endParaRPr>
-          </a:p>
-        </p:txBody>
-      </p:sp>
-      <p:sp>
-        <p:nvSpPr>
-          <p:cNvPr id="6" name="Google Shape;233;p38">
-            <a:extLst>
-              <a:ext uri="{FF2B5EF4-FFF2-40B4-BE49-F238E27FC236}">
-                <a16:creationId xmlns:a16="http://schemas.microsoft.com/office/drawing/2014/main" id="{E43149D2-1B55-53DF-1C68-44D9170DB9B3}"/>
-              </a:ext>
-            </a:extLst>
-          </p:cNvPr>
-          <p:cNvSpPr txBox="1"/>
-          <p:nvPr/>
-        </p:nvSpPr>
-        <p:spPr>
-          <a:xfrm>
-            <a:off x="2633437" y="2734321"/>
-            <a:ext cx="4056857" cy="974595"/>
-          </a:xfrm>
-          <a:prstGeom prst="rect">
-            <a:avLst/>
-          </a:prstGeom>
-          <a:noFill/>
-          <a:ln>
-            <a:noFill/>
-          </a:ln>
-        </p:spPr>
-        <p:txBody>
-          <a:bodyPr spcFirstLastPara="1" wrap="square" lIns="91425" tIns="91425" rIns="91425" bIns="91425" anchor="t" anchorCtr="0">
-            <a:spAutoFit/>
-          </a:bodyPr>
-          <a:lstStyle/>
-          <a:p>
-            <a:pPr marL="0" lvl="0" indent="0" algn="l" rtl="0">
-              <a:lnSpc>
-                <a:spcPct val="100000"/>
-              </a:lnSpc>
-              <a:spcBef>
-                <a:spcPts val="0"/>
-              </a:spcBef>
-              <a:spcAft>
-                <a:spcPts val="400"/>
-              </a:spcAft>
-              <a:buNone/>
-            </a:pPr>
-            <a:r>
-              <a:rPr lang="fr" sz="1600" dirty="0">
-                <a:solidFill>
-                  <a:srgbClr val="636366"/>
-                </a:solidFill>
-                <a:latin typeface="Montserrat"/>
-                <a:ea typeface="Montserrat"/>
-                <a:cs typeface="Montserrat"/>
-                <a:sym typeface="Montserrat"/>
-              </a:rPr>
-              <a:t>Ajout des modèles isotropes et angulaires pour la génération de surface</a:t>
-            </a:r>
-            <a:endParaRPr sz="1600" dirty="0">
-              <a:solidFill>
-                <a:srgbClr val="636366"/>
-              </a:solidFill>
-              <a:latin typeface="Montserrat"/>
-              <a:ea typeface="Montserrat"/>
-              <a:cs typeface="Montserrat"/>
-              <a:sym typeface="Montserrat"/>
-            </a:endParaRPr>
-          </a:p>
-        </p:txBody>
-      </p:sp>
-    </p:spTree>
-    <p:extLst>
-      <p:ext uri="{BB962C8B-B14F-4D97-AF65-F5344CB8AC3E}">
-        <p14:creationId xmlns:p14="http://schemas.microsoft.com/office/powerpoint/2010/main" val="784953006"/>
       </p:ext>
     </p:extLst>
   </p:cSld>
